--- a/relatorio_executivo.pptx
+++ b/relatorio_executivo.pptx
@@ -1,8 +1,8 @@
 
 <file path=ppt/presentation.xml><?xml version="1.0" encoding="utf-8"?>
-<p:presentation xmlns:a="http://schemas.openxmlformats.org/drawingml/2006/main" xmlns:r="http://schemas.openxmlformats.org/officeDocument/2006/relationships" xmlns:p="http://schemas.openxmlformats.org/presentationml/2006/main" saveSubsetFonts="1" embedTrueTypeFonts="true">
+<p:presentation xmlns:a="http://schemas.openxmlformats.org/drawingml/2006/main" xmlns:r="http://schemas.openxmlformats.org/officeDocument/2006/relationships" xmlns:p="http://schemas.openxmlformats.org/presentationml/2006/main" embedTrueTypeFonts="1" saveSubsetFonts="1">
   <p:sldMasterIdLst>
-    <p:sldMasterId id="2147483648" r:id="rId1"/>
+    <p:sldMasterId id="2147483659" r:id="rId5"/>
   </p:sldMasterIdLst>
   <p:sldIdLst>
     <p:sldId id="256" r:id="rId6"/>
@@ -11,19 +11,19 @@
   <p:notesSz cx="6858000" cy="9144000"/>
   <p:embeddedFontLst>
     <p:embeddedFont>
-      <p:font typeface="Agrandir Bold" charset="1" panose="00000800000000000000"/>
+      <p:font panose="00000800000000000000" typeface="Agrandir Bold"/>
       <p:regular r:id="rId7"/>
     </p:embeddedFont>
     <p:embeddedFont>
-      <p:font typeface="Agrandir" charset="1" panose="00000500000000000000"/>
+      <p:font panose="00000500000000000000" typeface="Agrandir"/>
       <p:regular r:id="rId8"/>
     </p:embeddedFont>
     <p:embeddedFont>
-      <p:font typeface="Museo Moderno" charset="1" panose="00000000000000000000"/>
+      <p:font panose="00000000000000000000" typeface="Museo Moderno"/>
       <p:regular r:id="rId9"/>
     </p:embeddedFont>
     <p:embeddedFont>
-      <p:font typeface="Open Sans" charset="1" panose="020B0606030504020204"/>
+      <p:font panose="020B0606030504020204" typeface="Open Sans"/>
       <p:regular r:id="rId10"/>
     </p:embeddedFont>
   </p:embeddedFontLst>
@@ -31,8 +31,8 @@
     <a:defPPr>
       <a:defRPr lang="en-US"/>
     </a:defPPr>
-    <a:lvl1pPr marL="0" algn="l" defTabSz="914400" rtl="0" eaLnBrk="1" latinLnBrk="0" hangingPunct="1">
-      <a:defRPr sz="1800" kern="1200">
+    <a:lvl1pPr algn="l" defTabSz="914400" eaLnBrk="1" hangingPunct="1" latinLnBrk="0" marL="0" rtl="0">
+      <a:defRPr kern="1200" sz="1800">
         <a:solidFill>
           <a:schemeClr val="tx1"/>
         </a:solidFill>
@@ -41,8 +41,8 @@
         <a:cs typeface="+mn-cs"/>
       </a:defRPr>
     </a:lvl1pPr>
-    <a:lvl2pPr marL="457200" algn="l" defTabSz="914400" rtl="0" eaLnBrk="1" latinLnBrk="0" hangingPunct="1">
-      <a:defRPr sz="1800" kern="1200">
+    <a:lvl2pPr algn="l" defTabSz="914400" eaLnBrk="1" hangingPunct="1" latinLnBrk="0" marL="457200" rtl="0">
+      <a:defRPr kern="1200" sz="1800">
         <a:solidFill>
           <a:schemeClr val="tx1"/>
         </a:solidFill>
@@ -51,8 +51,8 @@
         <a:cs typeface="+mn-cs"/>
       </a:defRPr>
     </a:lvl2pPr>
-    <a:lvl3pPr marL="914400" algn="l" defTabSz="914400" rtl="0" eaLnBrk="1" latinLnBrk="0" hangingPunct="1">
-      <a:defRPr sz="1800" kern="1200">
+    <a:lvl3pPr algn="l" defTabSz="914400" eaLnBrk="1" hangingPunct="1" latinLnBrk="0" marL="914400" rtl="0">
+      <a:defRPr kern="1200" sz="1800">
         <a:solidFill>
           <a:schemeClr val="tx1"/>
         </a:solidFill>
@@ -61,8 +61,8 @@
         <a:cs typeface="+mn-cs"/>
       </a:defRPr>
     </a:lvl3pPr>
-    <a:lvl4pPr marL="1371600" algn="l" defTabSz="914400" rtl="0" eaLnBrk="1" latinLnBrk="0" hangingPunct="1">
-      <a:defRPr sz="1800" kern="1200">
+    <a:lvl4pPr algn="l" defTabSz="914400" eaLnBrk="1" hangingPunct="1" latinLnBrk="0" marL="1371600" rtl="0">
+      <a:defRPr kern="1200" sz="1800">
         <a:solidFill>
           <a:schemeClr val="tx1"/>
         </a:solidFill>
@@ -71,8 +71,8 @@
         <a:cs typeface="+mn-cs"/>
       </a:defRPr>
     </a:lvl4pPr>
-    <a:lvl5pPr marL="1828800" algn="l" defTabSz="914400" rtl="0" eaLnBrk="1" latinLnBrk="0" hangingPunct="1">
-      <a:defRPr sz="1800" kern="1200">
+    <a:lvl5pPr algn="l" defTabSz="914400" eaLnBrk="1" hangingPunct="1" latinLnBrk="0" marL="1828800" rtl="0">
+      <a:defRPr kern="1200" sz="1800">
         <a:solidFill>
           <a:schemeClr val="tx1"/>
         </a:solidFill>
@@ -81,8 +81,8 @@
         <a:cs typeface="+mn-cs"/>
       </a:defRPr>
     </a:lvl5pPr>
-    <a:lvl6pPr marL="2286000" algn="l" defTabSz="914400" rtl="0" eaLnBrk="1" latinLnBrk="0" hangingPunct="1">
-      <a:defRPr sz="1800" kern="1200">
+    <a:lvl6pPr algn="l" defTabSz="914400" eaLnBrk="1" hangingPunct="1" latinLnBrk="0" marL="2286000" rtl="0">
+      <a:defRPr kern="1200" sz="1800">
         <a:solidFill>
           <a:schemeClr val="tx1"/>
         </a:solidFill>
@@ -91,8 +91,8 @@
         <a:cs typeface="+mn-cs"/>
       </a:defRPr>
     </a:lvl6pPr>
-    <a:lvl7pPr marL="2743200" algn="l" defTabSz="914400" rtl="0" eaLnBrk="1" latinLnBrk="0" hangingPunct="1">
-      <a:defRPr sz="1800" kern="1200">
+    <a:lvl7pPr algn="l" defTabSz="914400" eaLnBrk="1" hangingPunct="1" latinLnBrk="0" marL="2743200" rtl="0">
+      <a:defRPr kern="1200" sz="1800">
         <a:solidFill>
           <a:schemeClr val="tx1"/>
         </a:solidFill>
@@ -101,8 +101,8 @@
         <a:cs typeface="+mn-cs"/>
       </a:defRPr>
     </a:lvl7pPr>
-    <a:lvl8pPr marL="3200400" algn="l" defTabSz="914400" rtl="0" eaLnBrk="1" latinLnBrk="0" hangingPunct="1">
-      <a:defRPr sz="1800" kern="1200">
+    <a:lvl8pPr algn="l" defTabSz="914400" eaLnBrk="1" hangingPunct="1" latinLnBrk="0" marL="3200400" rtl="0">
+      <a:defRPr kern="1200" sz="1800">
         <a:solidFill>
           <a:schemeClr val="tx1"/>
         </a:solidFill>
@@ -111,8 +111,8 @@
         <a:cs typeface="+mn-cs"/>
       </a:defRPr>
     </a:lvl8pPr>
-    <a:lvl9pPr marL="3657600" algn="l" defTabSz="914400" rtl="0" eaLnBrk="1" latinLnBrk="0" hangingPunct="1">
-      <a:defRPr sz="1800" kern="1200">
+    <a:lvl9pPr algn="l" defTabSz="914400" eaLnBrk="1" hangingPunct="1" latinLnBrk="0" marL="3657600" rtl="0">
+      <a:defRPr kern="1200" sz="1800">
         <a:solidFill>
           <a:schemeClr val="tx1"/>
         </a:solidFill>
@@ -126,7 +126,7 @@
 </file>
 
 <file path=ppt/slideLayouts/slideLayout1.xml><?xml version="1.0" encoding="utf-8"?>
-<p:sldLayout xmlns:a="http://schemas.openxmlformats.org/drawingml/2006/main" xmlns:r="http://schemas.openxmlformats.org/officeDocument/2006/relationships" xmlns:p="http://schemas.openxmlformats.org/presentationml/2006/main" type="title" preserve="1">
+<p:sldLayout xmlns:a="http://schemas.openxmlformats.org/drawingml/2006/main" xmlns:r="http://schemas.openxmlformats.org/officeDocument/2006/relationships" xmlns:p="http://schemas.openxmlformats.org/presentationml/2006/main" preserve="1" type="title">
   <p:cSld name="Title Slide">
     <p:spTree>
       <p:nvGrpSpPr>
@@ -159,7 +159,7 @@
           </a:xfrm>
         </p:spPr>
         <p:txBody>
-          <a:bodyPr/>
+          <a:bodyPr numCol="1"/>
           <a:lstStyle/>
           <a:p>
             <a:r>
@@ -177,7 +177,7 @@
             <a:spLocks noGrp="1"/>
           </p:cNvSpPr>
           <p:nvPr>
-            <p:ph type="subTitle" idx="1"/>
+            <p:ph idx="1" type="subTitle"/>
           </p:nvPr>
         </p:nvSpPr>
         <p:spPr>
@@ -187,9 +187,9 @@
           </a:xfrm>
         </p:spPr>
         <p:txBody>
-          <a:bodyPr/>
+          <a:bodyPr numCol="1"/>
           <a:lstStyle>
-            <a:lvl1pPr marL="0" indent="0" algn="ctr">
+            <a:lvl1pPr algn="ctr" indent="0" marL="0">
               <a:buNone/>
               <a:defRPr>
                 <a:solidFill>
@@ -199,7 +199,7 @@
                 </a:solidFill>
               </a:defRPr>
             </a:lvl1pPr>
-            <a:lvl2pPr marL="457200" indent="0" algn="ctr">
+            <a:lvl2pPr algn="ctr" indent="0" marL="457200">
               <a:buNone/>
               <a:defRPr>
                 <a:solidFill>
@@ -209,7 +209,7 @@
                 </a:solidFill>
               </a:defRPr>
             </a:lvl2pPr>
-            <a:lvl3pPr marL="914400" indent="0" algn="ctr">
+            <a:lvl3pPr algn="ctr" indent="0" marL="914400">
               <a:buNone/>
               <a:defRPr>
                 <a:solidFill>
@@ -219,7 +219,7 @@
                 </a:solidFill>
               </a:defRPr>
             </a:lvl3pPr>
-            <a:lvl4pPr marL="1371600" indent="0" algn="ctr">
+            <a:lvl4pPr algn="ctr" indent="0" marL="1371600">
               <a:buNone/>
               <a:defRPr>
                 <a:solidFill>
@@ -229,7 +229,7 @@
                 </a:solidFill>
               </a:defRPr>
             </a:lvl4pPr>
-            <a:lvl5pPr marL="1828800" indent="0" algn="ctr">
+            <a:lvl5pPr algn="ctr" indent="0" marL="1828800">
               <a:buNone/>
               <a:defRPr>
                 <a:solidFill>
@@ -239,7 +239,7 @@
                 </a:solidFill>
               </a:defRPr>
             </a:lvl5pPr>
-            <a:lvl6pPr marL="2286000" indent="0" algn="ctr">
+            <a:lvl6pPr algn="ctr" indent="0" marL="2286000">
               <a:buNone/>
               <a:defRPr>
                 <a:solidFill>
@@ -249,7 +249,7 @@
                 </a:solidFill>
               </a:defRPr>
             </a:lvl6pPr>
-            <a:lvl7pPr marL="2743200" indent="0" algn="ctr">
+            <a:lvl7pPr algn="ctr" indent="0" marL="2743200">
               <a:buNone/>
               <a:defRPr>
                 <a:solidFill>
@@ -259,7 +259,7 @@
                 </a:solidFill>
               </a:defRPr>
             </a:lvl7pPr>
-            <a:lvl8pPr marL="3200400" indent="0" algn="ctr">
+            <a:lvl8pPr algn="ctr" indent="0" marL="3200400">
               <a:buNone/>
               <a:defRPr>
                 <a:solidFill>
@@ -269,7 +269,7 @@
                 </a:solidFill>
               </a:defRPr>
             </a:lvl8pPr>
-            <a:lvl9pPr marL="3657600" indent="0" algn="ctr">
+            <a:lvl9pPr algn="ctr" indent="0" marL="3657600">
               <a:buNone/>
               <a:defRPr>
                 <a:solidFill>
@@ -296,12 +296,12 @@
             <a:spLocks noGrp="1"/>
           </p:cNvSpPr>
           <p:nvPr>
-            <p:ph type="dt" sz="half" idx="10"/>
+            <p:ph idx="10" sz="half" type="dt"/>
           </p:nvPr>
         </p:nvSpPr>
         <p:spPr/>
         <p:txBody>
-          <a:bodyPr/>
+          <a:bodyPr numCol="1"/>
           <a:lstStyle/>
           <a:p>
             <a:fld id="{1D8BD707-D9CF-40AE-B4C6-C98DA3205C09}" type="datetimeFigureOut">
@@ -320,12 +320,12 @@
             <a:spLocks noGrp="1"/>
           </p:cNvSpPr>
           <p:nvPr>
-            <p:ph type="ftr" sz="quarter" idx="11"/>
+            <p:ph idx="11" sz="quarter" type="ftr"/>
           </p:nvPr>
         </p:nvSpPr>
         <p:spPr/>
         <p:txBody>
-          <a:bodyPr/>
+          <a:bodyPr numCol="1"/>
           <a:lstStyle/>
           <a:p>
             <a:endParaRPr lang="en-US"/>
@@ -339,12 +339,12 @@
             <a:spLocks noGrp="1"/>
           </p:cNvSpPr>
           <p:nvPr>
-            <p:ph type="sldNum" sz="quarter" idx="12"/>
+            <p:ph idx="12" sz="quarter" type="sldNum"/>
           </p:nvPr>
         </p:nvSpPr>
         <p:spPr/>
         <p:txBody>
-          <a:bodyPr/>
+          <a:bodyPr numCol="1"/>
           <a:lstStyle/>
           <a:p>
             <a:fld id="{B6F15528-21DE-4FAA-801E-634DDDAF4B2B}" type="slidenum">
@@ -365,7 +365,7 @@
 </file>
 
 <file path=ppt/slideLayouts/slideLayout10.xml><?xml version="1.0" encoding="utf-8"?>
-<p:sldLayout xmlns:a="http://schemas.openxmlformats.org/drawingml/2006/main" xmlns:r="http://schemas.openxmlformats.org/officeDocument/2006/relationships" xmlns:p="http://schemas.openxmlformats.org/presentationml/2006/main" type="vertTx" preserve="1">
+<p:sldLayout xmlns:a="http://schemas.openxmlformats.org/drawingml/2006/main" xmlns:r="http://schemas.openxmlformats.org/officeDocument/2006/relationships" xmlns:p="http://schemas.openxmlformats.org/presentationml/2006/main" preserve="1" type="vertTx">
   <p:cSld name="Title and Vertical Text">
     <p:spTree>
       <p:nvGrpSpPr>
@@ -393,7 +393,7 @@
         </p:nvSpPr>
         <p:spPr/>
         <p:txBody>
-          <a:bodyPr/>
+          <a:bodyPr numCol="1"/>
           <a:lstStyle/>
           <a:p>
             <a:r>
@@ -411,12 +411,12 @@
             <a:spLocks noGrp="1"/>
           </p:cNvSpPr>
           <p:nvPr>
-            <p:ph type="body" orient="vert" idx="1"/>
+            <p:ph idx="1" orient="vert" type="body"/>
           </p:nvPr>
         </p:nvSpPr>
         <p:spPr/>
         <p:txBody>
-          <a:bodyPr vert="eaVert"/>
+          <a:bodyPr numCol="1" vert="eaVert"/>
           <a:lstStyle/>
           <a:p>
             <a:pPr lvl="0"/>
@@ -463,12 +463,12 @@
             <a:spLocks noGrp="1"/>
           </p:cNvSpPr>
           <p:nvPr>
-            <p:ph type="dt" sz="half" idx="10"/>
+            <p:ph idx="10" sz="half" type="dt"/>
           </p:nvPr>
         </p:nvSpPr>
         <p:spPr/>
         <p:txBody>
-          <a:bodyPr/>
+          <a:bodyPr numCol="1"/>
           <a:lstStyle/>
           <a:p>
             <a:fld id="{1D8BD707-D9CF-40AE-B4C6-C98DA3205C09}" type="datetimeFigureOut">
@@ -487,12 +487,12 @@
             <a:spLocks noGrp="1"/>
           </p:cNvSpPr>
           <p:nvPr>
-            <p:ph type="ftr" sz="quarter" idx="11"/>
+            <p:ph idx="11" sz="quarter" type="ftr"/>
           </p:nvPr>
         </p:nvSpPr>
         <p:spPr/>
         <p:txBody>
-          <a:bodyPr/>
+          <a:bodyPr numCol="1"/>
           <a:lstStyle/>
           <a:p>
             <a:endParaRPr lang="en-US"/>
@@ -506,12 +506,12 @@
             <a:spLocks noGrp="1"/>
           </p:cNvSpPr>
           <p:nvPr>
-            <p:ph type="sldNum" sz="quarter" idx="12"/>
+            <p:ph idx="12" sz="quarter" type="sldNum"/>
           </p:nvPr>
         </p:nvSpPr>
         <p:spPr/>
         <p:txBody>
-          <a:bodyPr/>
+          <a:bodyPr numCol="1"/>
           <a:lstStyle/>
           <a:p>
             <a:fld id="{B6F15528-21DE-4FAA-801E-634DDDAF4B2B}" type="slidenum">
@@ -532,7 +532,7 @@
 </file>
 
 <file path=ppt/slideLayouts/slideLayout11.xml><?xml version="1.0" encoding="utf-8"?>
-<p:sldLayout xmlns:a="http://schemas.openxmlformats.org/drawingml/2006/main" xmlns:r="http://schemas.openxmlformats.org/officeDocument/2006/relationships" xmlns:p="http://schemas.openxmlformats.org/presentationml/2006/main" type="vertTitleAndTx" preserve="1">
+<p:sldLayout xmlns:a="http://schemas.openxmlformats.org/drawingml/2006/main" xmlns:r="http://schemas.openxmlformats.org/officeDocument/2006/relationships" xmlns:p="http://schemas.openxmlformats.org/presentationml/2006/main" preserve="1" type="vertTitleAndTx">
   <p:cSld name="Vertical Title and Text">
     <p:spTree>
       <p:nvGrpSpPr>
@@ -555,7 +555,7 @@
             <a:spLocks noGrp="1"/>
           </p:cNvSpPr>
           <p:nvPr>
-            <p:ph type="title" orient="vert"/>
+            <p:ph orient="vert" type="title"/>
           </p:nvPr>
         </p:nvSpPr>
         <p:spPr>
@@ -565,7 +565,7 @@
           </a:xfrm>
         </p:spPr>
         <p:txBody>
-          <a:bodyPr vert="eaVert"/>
+          <a:bodyPr numCol="1" vert="eaVert"/>
           <a:lstStyle/>
           <a:p>
             <a:r>
@@ -583,7 +583,7 @@
             <a:spLocks noGrp="1"/>
           </p:cNvSpPr>
           <p:nvPr>
-            <p:ph type="body" orient="vert" idx="1"/>
+            <p:ph idx="1" orient="vert" type="body"/>
           </p:nvPr>
         </p:nvSpPr>
         <p:spPr>
@@ -593,7 +593,7 @@
           </a:xfrm>
         </p:spPr>
         <p:txBody>
-          <a:bodyPr vert="eaVert"/>
+          <a:bodyPr numCol="1" vert="eaVert"/>
           <a:lstStyle/>
           <a:p>
             <a:pPr lvl="0"/>
@@ -640,12 +640,12 @@
             <a:spLocks noGrp="1"/>
           </p:cNvSpPr>
           <p:nvPr>
-            <p:ph type="dt" sz="half" idx="10"/>
+            <p:ph idx="10" sz="half" type="dt"/>
           </p:nvPr>
         </p:nvSpPr>
         <p:spPr/>
         <p:txBody>
-          <a:bodyPr/>
+          <a:bodyPr numCol="1"/>
           <a:lstStyle/>
           <a:p>
             <a:fld id="{1D8BD707-D9CF-40AE-B4C6-C98DA3205C09}" type="datetimeFigureOut">
@@ -664,12 +664,12 @@
             <a:spLocks noGrp="1"/>
           </p:cNvSpPr>
           <p:nvPr>
-            <p:ph type="ftr" sz="quarter" idx="11"/>
+            <p:ph idx="11" sz="quarter" type="ftr"/>
           </p:nvPr>
         </p:nvSpPr>
         <p:spPr/>
         <p:txBody>
-          <a:bodyPr/>
+          <a:bodyPr numCol="1"/>
           <a:lstStyle/>
           <a:p>
             <a:endParaRPr lang="en-US"/>
@@ -683,12 +683,12 @@
             <a:spLocks noGrp="1"/>
           </p:cNvSpPr>
           <p:nvPr>
-            <p:ph type="sldNum" sz="quarter" idx="12"/>
+            <p:ph idx="12" sz="quarter" type="sldNum"/>
           </p:nvPr>
         </p:nvSpPr>
         <p:spPr/>
         <p:txBody>
-          <a:bodyPr/>
+          <a:bodyPr numCol="1"/>
           <a:lstStyle/>
           <a:p>
             <a:fld id="{B6F15528-21DE-4FAA-801E-634DDDAF4B2B}" type="slidenum">
@@ -709,7 +709,7 @@
 </file>
 
 <file path=ppt/slideLayouts/slideLayout2.xml><?xml version="1.0" encoding="utf-8"?>
-<p:sldLayout xmlns:a="http://schemas.openxmlformats.org/drawingml/2006/main" xmlns:r="http://schemas.openxmlformats.org/officeDocument/2006/relationships" xmlns:p="http://schemas.openxmlformats.org/presentationml/2006/main" type="obj" preserve="1">
+<p:sldLayout xmlns:a="http://schemas.openxmlformats.org/drawingml/2006/main" xmlns:r="http://schemas.openxmlformats.org/officeDocument/2006/relationships" xmlns:p="http://schemas.openxmlformats.org/presentationml/2006/main" preserve="1" type="obj">
   <p:cSld name="Title and Content">
     <p:spTree>
       <p:nvGrpSpPr>
@@ -737,7 +737,7 @@
         </p:nvSpPr>
         <p:spPr/>
         <p:txBody>
-          <a:bodyPr/>
+          <a:bodyPr numCol="1"/>
           <a:lstStyle/>
           <a:p>
             <a:r>
@@ -760,7 +760,7 @@
         </p:nvSpPr>
         <p:spPr/>
         <p:txBody>
-          <a:bodyPr/>
+          <a:bodyPr numCol="1"/>
           <a:lstStyle/>
           <a:p>
             <a:pPr lvl="0"/>
@@ -807,12 +807,12 @@
             <a:spLocks noGrp="1"/>
           </p:cNvSpPr>
           <p:nvPr>
-            <p:ph type="dt" sz="half" idx="10"/>
+            <p:ph idx="10" sz="half" type="dt"/>
           </p:nvPr>
         </p:nvSpPr>
         <p:spPr/>
         <p:txBody>
-          <a:bodyPr/>
+          <a:bodyPr numCol="1"/>
           <a:lstStyle/>
           <a:p>
             <a:fld id="{1D8BD707-D9CF-40AE-B4C6-C98DA3205C09}" type="datetimeFigureOut">
@@ -831,12 +831,12 @@
             <a:spLocks noGrp="1"/>
           </p:cNvSpPr>
           <p:nvPr>
-            <p:ph type="ftr" sz="quarter" idx="11"/>
+            <p:ph idx="11" sz="quarter" type="ftr"/>
           </p:nvPr>
         </p:nvSpPr>
         <p:spPr/>
         <p:txBody>
-          <a:bodyPr/>
+          <a:bodyPr numCol="1"/>
           <a:lstStyle/>
           <a:p>
             <a:endParaRPr lang="en-US"/>
@@ -850,12 +850,12 @@
             <a:spLocks noGrp="1"/>
           </p:cNvSpPr>
           <p:nvPr>
-            <p:ph type="sldNum" sz="quarter" idx="12"/>
+            <p:ph idx="12" sz="quarter" type="sldNum"/>
           </p:nvPr>
         </p:nvSpPr>
         <p:spPr/>
         <p:txBody>
-          <a:bodyPr/>
+          <a:bodyPr numCol="1"/>
           <a:lstStyle/>
           <a:p>
             <a:fld id="{B6F15528-21DE-4FAA-801E-634DDDAF4B2B}" type="slidenum">
@@ -876,7 +876,7 @@
 </file>
 
 <file path=ppt/slideLayouts/slideLayout3.xml><?xml version="1.0" encoding="utf-8"?>
-<p:sldLayout xmlns:a="http://schemas.openxmlformats.org/drawingml/2006/main" xmlns:r="http://schemas.openxmlformats.org/officeDocument/2006/relationships" xmlns:p="http://schemas.openxmlformats.org/presentationml/2006/main" type="secHead" preserve="1">
+<p:sldLayout xmlns:a="http://schemas.openxmlformats.org/drawingml/2006/main" xmlns:r="http://schemas.openxmlformats.org/officeDocument/2006/relationships" xmlns:p="http://schemas.openxmlformats.org/presentationml/2006/main" preserve="1" type="secHead">
   <p:cSld name="Section Header">
     <p:spTree>
       <p:nvGrpSpPr>
@@ -909,10 +909,10 @@
           </a:xfrm>
         </p:spPr>
         <p:txBody>
-          <a:bodyPr anchor="t"/>
+          <a:bodyPr anchor="t" numCol="1"/>
           <a:lstStyle>
             <a:lvl1pPr algn="l">
-              <a:defRPr sz="4000" b="1" cap="all"/>
+              <a:defRPr b="1" cap="all" sz="4000"/>
             </a:lvl1pPr>
           </a:lstStyle>
           <a:p>
@@ -931,7 +931,7 @@
             <a:spLocks noGrp="1"/>
           </p:cNvSpPr>
           <p:nvPr>
-            <p:ph type="body" idx="1"/>
+            <p:ph idx="1" type="body"/>
           </p:nvPr>
         </p:nvSpPr>
         <p:spPr>
@@ -941,9 +941,9 @@
           </a:xfrm>
         </p:spPr>
         <p:txBody>
-          <a:bodyPr anchor="b"/>
+          <a:bodyPr anchor="b" numCol="1"/>
           <a:lstStyle>
-            <a:lvl1pPr marL="0" indent="0">
+            <a:lvl1pPr indent="0" marL="0">
               <a:buNone/>
               <a:defRPr sz="2000">
                 <a:solidFill>
@@ -953,7 +953,7 @@
                 </a:solidFill>
               </a:defRPr>
             </a:lvl1pPr>
-            <a:lvl2pPr marL="457200" indent="0">
+            <a:lvl2pPr indent="0" marL="457200">
               <a:buNone/>
               <a:defRPr sz="1800">
                 <a:solidFill>
@@ -963,7 +963,7 @@
                 </a:solidFill>
               </a:defRPr>
             </a:lvl2pPr>
-            <a:lvl3pPr marL="914400" indent="0">
+            <a:lvl3pPr indent="0" marL="914400">
               <a:buNone/>
               <a:defRPr sz="1600">
                 <a:solidFill>
@@ -973,7 +973,7 @@
                 </a:solidFill>
               </a:defRPr>
             </a:lvl3pPr>
-            <a:lvl4pPr marL="1371600" indent="0">
+            <a:lvl4pPr indent="0" marL="1371600">
               <a:buNone/>
               <a:defRPr sz="1400">
                 <a:solidFill>
@@ -983,7 +983,7 @@
                 </a:solidFill>
               </a:defRPr>
             </a:lvl4pPr>
-            <a:lvl5pPr marL="1828800" indent="0">
+            <a:lvl5pPr indent="0" marL="1828800">
               <a:buNone/>
               <a:defRPr sz="1400">
                 <a:solidFill>
@@ -993,7 +993,7 @@
                 </a:solidFill>
               </a:defRPr>
             </a:lvl5pPr>
-            <a:lvl6pPr marL="2286000" indent="0">
+            <a:lvl6pPr indent="0" marL="2286000">
               <a:buNone/>
               <a:defRPr sz="1400">
                 <a:solidFill>
@@ -1003,7 +1003,7 @@
                 </a:solidFill>
               </a:defRPr>
             </a:lvl6pPr>
-            <a:lvl7pPr marL="2743200" indent="0">
+            <a:lvl7pPr indent="0" marL="2743200">
               <a:buNone/>
               <a:defRPr sz="1400">
                 <a:solidFill>
@@ -1013,7 +1013,7 @@
                 </a:solidFill>
               </a:defRPr>
             </a:lvl7pPr>
-            <a:lvl8pPr marL="3200400" indent="0">
+            <a:lvl8pPr indent="0" marL="3200400">
               <a:buNone/>
               <a:defRPr sz="1400">
                 <a:solidFill>
@@ -1023,7 +1023,7 @@
                 </a:solidFill>
               </a:defRPr>
             </a:lvl8pPr>
-            <a:lvl9pPr marL="3657600" indent="0">
+            <a:lvl9pPr indent="0" marL="3657600">
               <a:buNone/>
               <a:defRPr sz="1400">
                 <a:solidFill>
@@ -1050,12 +1050,12 @@
             <a:spLocks noGrp="1"/>
           </p:cNvSpPr>
           <p:nvPr>
-            <p:ph type="dt" sz="half" idx="10"/>
+            <p:ph idx="10" sz="half" type="dt"/>
           </p:nvPr>
         </p:nvSpPr>
         <p:spPr/>
         <p:txBody>
-          <a:bodyPr/>
+          <a:bodyPr numCol="1"/>
           <a:lstStyle/>
           <a:p>
             <a:fld id="{1D8BD707-D9CF-40AE-B4C6-C98DA3205C09}" type="datetimeFigureOut">
@@ -1074,12 +1074,12 @@
             <a:spLocks noGrp="1"/>
           </p:cNvSpPr>
           <p:nvPr>
-            <p:ph type="ftr" sz="quarter" idx="11"/>
+            <p:ph idx="11" sz="quarter" type="ftr"/>
           </p:nvPr>
         </p:nvSpPr>
         <p:spPr/>
         <p:txBody>
-          <a:bodyPr/>
+          <a:bodyPr numCol="1"/>
           <a:lstStyle/>
           <a:p>
             <a:endParaRPr lang="en-US"/>
@@ -1093,12 +1093,12 @@
             <a:spLocks noGrp="1"/>
           </p:cNvSpPr>
           <p:nvPr>
-            <p:ph type="sldNum" sz="quarter" idx="12"/>
+            <p:ph idx="12" sz="quarter" type="sldNum"/>
           </p:nvPr>
         </p:nvSpPr>
         <p:spPr/>
         <p:txBody>
-          <a:bodyPr/>
+          <a:bodyPr numCol="1"/>
           <a:lstStyle/>
           <a:p>
             <a:fld id="{B6F15528-21DE-4FAA-801E-634DDDAF4B2B}" type="slidenum">
@@ -1119,7 +1119,7 @@
 </file>
 
 <file path=ppt/slideLayouts/slideLayout4.xml><?xml version="1.0" encoding="utf-8"?>
-<p:sldLayout xmlns:a="http://schemas.openxmlformats.org/drawingml/2006/main" xmlns:r="http://schemas.openxmlformats.org/officeDocument/2006/relationships" xmlns:p="http://schemas.openxmlformats.org/presentationml/2006/main" type="twoObj" preserve="1">
+<p:sldLayout xmlns:a="http://schemas.openxmlformats.org/drawingml/2006/main" xmlns:r="http://schemas.openxmlformats.org/officeDocument/2006/relationships" xmlns:p="http://schemas.openxmlformats.org/presentationml/2006/main" preserve="1" type="twoObj">
   <p:cSld name="Two Content">
     <p:spTree>
       <p:nvGrpSpPr>
@@ -1147,7 +1147,7 @@
         </p:nvSpPr>
         <p:spPr/>
         <p:txBody>
-          <a:bodyPr/>
+          <a:bodyPr numCol="1"/>
           <a:lstStyle/>
           <a:p>
             <a:r>
@@ -1165,7 +1165,7 @@
             <a:spLocks noGrp="1"/>
           </p:cNvSpPr>
           <p:nvPr>
-            <p:ph sz="half" idx="1"/>
+            <p:ph idx="1" sz="half"/>
           </p:nvPr>
         </p:nvSpPr>
         <p:spPr>
@@ -1175,7 +1175,7 @@
           </a:xfrm>
         </p:spPr>
         <p:txBody>
-          <a:bodyPr/>
+          <a:bodyPr numCol="1"/>
           <a:lstStyle>
             <a:lvl1pPr>
               <a:defRPr sz="2800"/>
@@ -1250,7 +1250,7 @@
             <a:spLocks noGrp="1"/>
           </p:cNvSpPr>
           <p:nvPr>
-            <p:ph sz="half" idx="2"/>
+            <p:ph idx="2" sz="half"/>
           </p:nvPr>
         </p:nvSpPr>
         <p:spPr>
@@ -1260,7 +1260,7 @@
           </a:xfrm>
         </p:spPr>
         <p:txBody>
-          <a:bodyPr/>
+          <a:bodyPr numCol="1"/>
           <a:lstStyle>
             <a:lvl1pPr>
               <a:defRPr sz="2800"/>
@@ -1335,12 +1335,12 @@
             <a:spLocks noGrp="1"/>
           </p:cNvSpPr>
           <p:nvPr>
-            <p:ph type="dt" sz="half" idx="10"/>
+            <p:ph idx="10" sz="half" type="dt"/>
           </p:nvPr>
         </p:nvSpPr>
         <p:spPr/>
         <p:txBody>
-          <a:bodyPr/>
+          <a:bodyPr numCol="1"/>
           <a:lstStyle/>
           <a:p>
             <a:fld id="{1D8BD707-D9CF-40AE-B4C6-C98DA3205C09}" type="datetimeFigureOut">
@@ -1359,12 +1359,12 @@
             <a:spLocks noGrp="1"/>
           </p:cNvSpPr>
           <p:nvPr>
-            <p:ph type="ftr" sz="quarter" idx="11"/>
+            <p:ph idx="11" sz="quarter" type="ftr"/>
           </p:nvPr>
         </p:nvSpPr>
         <p:spPr/>
         <p:txBody>
-          <a:bodyPr/>
+          <a:bodyPr numCol="1"/>
           <a:lstStyle/>
           <a:p>
             <a:endParaRPr lang="en-US"/>
@@ -1378,12 +1378,12 @@
             <a:spLocks noGrp="1"/>
           </p:cNvSpPr>
           <p:nvPr>
-            <p:ph type="sldNum" sz="quarter" idx="12"/>
+            <p:ph idx="12" sz="quarter" type="sldNum"/>
           </p:nvPr>
         </p:nvSpPr>
         <p:spPr/>
         <p:txBody>
-          <a:bodyPr/>
+          <a:bodyPr numCol="1"/>
           <a:lstStyle/>
           <a:p>
             <a:fld id="{B6F15528-21DE-4FAA-801E-634DDDAF4B2B}" type="slidenum">
@@ -1404,7 +1404,7 @@
 </file>
 
 <file path=ppt/slideLayouts/slideLayout5.xml><?xml version="1.0" encoding="utf-8"?>
-<p:sldLayout xmlns:a="http://schemas.openxmlformats.org/drawingml/2006/main" xmlns:r="http://schemas.openxmlformats.org/officeDocument/2006/relationships" xmlns:p="http://schemas.openxmlformats.org/presentationml/2006/main" type="twoTxTwoObj" preserve="1">
+<p:sldLayout xmlns:a="http://schemas.openxmlformats.org/drawingml/2006/main" xmlns:r="http://schemas.openxmlformats.org/officeDocument/2006/relationships" xmlns:p="http://schemas.openxmlformats.org/presentationml/2006/main" preserve="1" type="twoTxTwoObj">
   <p:cSld name="Comparison">
     <p:spTree>
       <p:nvGrpSpPr>
@@ -1432,7 +1432,7 @@
         </p:nvSpPr>
         <p:spPr/>
         <p:txBody>
-          <a:bodyPr/>
+          <a:bodyPr numCol="1"/>
           <a:lstStyle>
             <a:lvl1pPr>
               <a:defRPr/>
@@ -1454,7 +1454,7 @@
             <a:spLocks noGrp="1"/>
           </p:cNvSpPr>
           <p:nvPr>
-            <p:ph type="body" idx="1"/>
+            <p:ph idx="1" type="body"/>
           </p:nvPr>
         </p:nvSpPr>
         <p:spPr>
@@ -1464,43 +1464,43 @@
           </a:xfrm>
         </p:spPr>
         <p:txBody>
-          <a:bodyPr anchor="b"/>
+          <a:bodyPr anchor="b" numCol="1"/>
           <a:lstStyle>
-            <a:lvl1pPr marL="0" indent="0">
-              <a:buNone/>
-              <a:defRPr sz="2400" b="1"/>
+            <a:lvl1pPr indent="0" marL="0">
+              <a:buNone/>
+              <a:defRPr b="1" sz="2400"/>
             </a:lvl1pPr>
-            <a:lvl2pPr marL="457200" indent="0">
-              <a:buNone/>
-              <a:defRPr sz="2000" b="1"/>
+            <a:lvl2pPr indent="0" marL="457200">
+              <a:buNone/>
+              <a:defRPr b="1" sz="2000"/>
             </a:lvl2pPr>
-            <a:lvl3pPr marL="914400" indent="0">
-              <a:buNone/>
-              <a:defRPr sz="1800" b="1"/>
+            <a:lvl3pPr indent="0" marL="914400">
+              <a:buNone/>
+              <a:defRPr b="1" sz="1800"/>
             </a:lvl3pPr>
-            <a:lvl4pPr marL="1371600" indent="0">
-              <a:buNone/>
-              <a:defRPr sz="1600" b="1"/>
+            <a:lvl4pPr indent="0" marL="1371600">
+              <a:buNone/>
+              <a:defRPr b="1" sz="1600"/>
             </a:lvl4pPr>
-            <a:lvl5pPr marL="1828800" indent="0">
-              <a:buNone/>
-              <a:defRPr sz="1600" b="1"/>
+            <a:lvl5pPr indent="0" marL="1828800">
+              <a:buNone/>
+              <a:defRPr b="1" sz="1600"/>
             </a:lvl5pPr>
-            <a:lvl6pPr marL="2286000" indent="0">
-              <a:buNone/>
-              <a:defRPr sz="1600" b="1"/>
+            <a:lvl6pPr indent="0" marL="2286000">
+              <a:buNone/>
+              <a:defRPr b="1" sz="1600"/>
             </a:lvl6pPr>
-            <a:lvl7pPr marL="2743200" indent="0">
-              <a:buNone/>
-              <a:defRPr sz="1600" b="1"/>
+            <a:lvl7pPr indent="0" marL="2743200">
+              <a:buNone/>
+              <a:defRPr b="1" sz="1600"/>
             </a:lvl7pPr>
-            <a:lvl8pPr marL="3200400" indent="0">
-              <a:buNone/>
-              <a:defRPr sz="1600" b="1"/>
+            <a:lvl8pPr indent="0" marL="3200400">
+              <a:buNone/>
+              <a:defRPr b="1" sz="1600"/>
             </a:lvl8pPr>
-            <a:lvl9pPr marL="3657600" indent="0">
-              <a:buNone/>
-              <a:defRPr sz="1600" b="1"/>
+            <a:lvl9pPr indent="0" marL="3657600">
+              <a:buNone/>
+              <a:defRPr b="1" sz="1600"/>
             </a:lvl9pPr>
           </a:lstStyle>
           <a:p>
@@ -1519,7 +1519,7 @@
             <a:spLocks noGrp="1"/>
           </p:cNvSpPr>
           <p:nvPr>
-            <p:ph sz="half" idx="2"/>
+            <p:ph idx="2" sz="half"/>
           </p:nvPr>
         </p:nvSpPr>
         <p:spPr>
@@ -1529,7 +1529,7 @@
           </a:xfrm>
         </p:spPr>
         <p:txBody>
-          <a:bodyPr/>
+          <a:bodyPr numCol="1"/>
           <a:lstStyle>
             <a:lvl1pPr>
               <a:defRPr sz="2400"/>
@@ -1604,7 +1604,7 @@
             <a:spLocks noGrp="1"/>
           </p:cNvSpPr>
           <p:nvPr>
-            <p:ph type="body" sz="quarter" idx="3"/>
+            <p:ph idx="3" sz="quarter" type="body"/>
           </p:nvPr>
         </p:nvSpPr>
         <p:spPr>
@@ -1614,43 +1614,43 @@
           </a:xfrm>
         </p:spPr>
         <p:txBody>
-          <a:bodyPr anchor="b"/>
+          <a:bodyPr anchor="b" numCol="1"/>
           <a:lstStyle>
-            <a:lvl1pPr marL="0" indent="0">
-              <a:buNone/>
-              <a:defRPr sz="2400" b="1"/>
+            <a:lvl1pPr indent="0" marL="0">
+              <a:buNone/>
+              <a:defRPr b="1" sz="2400"/>
             </a:lvl1pPr>
-            <a:lvl2pPr marL="457200" indent="0">
-              <a:buNone/>
-              <a:defRPr sz="2000" b="1"/>
+            <a:lvl2pPr indent="0" marL="457200">
+              <a:buNone/>
+              <a:defRPr b="1" sz="2000"/>
             </a:lvl2pPr>
-            <a:lvl3pPr marL="914400" indent="0">
-              <a:buNone/>
-              <a:defRPr sz="1800" b="1"/>
+            <a:lvl3pPr indent="0" marL="914400">
+              <a:buNone/>
+              <a:defRPr b="1" sz="1800"/>
             </a:lvl3pPr>
-            <a:lvl4pPr marL="1371600" indent="0">
-              <a:buNone/>
-              <a:defRPr sz="1600" b="1"/>
+            <a:lvl4pPr indent="0" marL="1371600">
+              <a:buNone/>
+              <a:defRPr b="1" sz="1600"/>
             </a:lvl4pPr>
-            <a:lvl5pPr marL="1828800" indent="0">
-              <a:buNone/>
-              <a:defRPr sz="1600" b="1"/>
+            <a:lvl5pPr indent="0" marL="1828800">
+              <a:buNone/>
+              <a:defRPr b="1" sz="1600"/>
             </a:lvl5pPr>
-            <a:lvl6pPr marL="2286000" indent="0">
-              <a:buNone/>
-              <a:defRPr sz="1600" b="1"/>
+            <a:lvl6pPr indent="0" marL="2286000">
+              <a:buNone/>
+              <a:defRPr b="1" sz="1600"/>
             </a:lvl6pPr>
-            <a:lvl7pPr marL="2743200" indent="0">
-              <a:buNone/>
-              <a:defRPr sz="1600" b="1"/>
+            <a:lvl7pPr indent="0" marL="2743200">
+              <a:buNone/>
+              <a:defRPr b="1" sz="1600"/>
             </a:lvl7pPr>
-            <a:lvl8pPr marL="3200400" indent="0">
-              <a:buNone/>
-              <a:defRPr sz="1600" b="1"/>
+            <a:lvl8pPr indent="0" marL="3200400">
+              <a:buNone/>
+              <a:defRPr b="1" sz="1600"/>
             </a:lvl8pPr>
-            <a:lvl9pPr marL="3657600" indent="0">
-              <a:buNone/>
-              <a:defRPr sz="1600" b="1"/>
+            <a:lvl9pPr indent="0" marL="3657600">
+              <a:buNone/>
+              <a:defRPr b="1" sz="1600"/>
             </a:lvl9pPr>
           </a:lstStyle>
           <a:p>
@@ -1669,7 +1669,7 @@
             <a:spLocks noGrp="1"/>
           </p:cNvSpPr>
           <p:nvPr>
-            <p:ph sz="quarter" idx="4"/>
+            <p:ph idx="4" sz="quarter"/>
           </p:nvPr>
         </p:nvSpPr>
         <p:spPr>
@@ -1679,7 +1679,7 @@
           </a:xfrm>
         </p:spPr>
         <p:txBody>
-          <a:bodyPr/>
+          <a:bodyPr numCol="1"/>
           <a:lstStyle>
             <a:lvl1pPr>
               <a:defRPr sz="2400"/>
@@ -1754,12 +1754,12 @@
             <a:spLocks noGrp="1"/>
           </p:cNvSpPr>
           <p:nvPr>
-            <p:ph type="dt" sz="half" idx="10"/>
+            <p:ph idx="10" sz="half" type="dt"/>
           </p:nvPr>
         </p:nvSpPr>
         <p:spPr/>
         <p:txBody>
-          <a:bodyPr/>
+          <a:bodyPr numCol="1"/>
           <a:lstStyle/>
           <a:p>
             <a:fld id="{1D8BD707-D9CF-40AE-B4C6-C98DA3205C09}" type="datetimeFigureOut">
@@ -1778,12 +1778,12 @@
             <a:spLocks noGrp="1"/>
           </p:cNvSpPr>
           <p:nvPr>
-            <p:ph type="ftr" sz="quarter" idx="11"/>
+            <p:ph idx="11" sz="quarter" type="ftr"/>
           </p:nvPr>
         </p:nvSpPr>
         <p:spPr/>
         <p:txBody>
-          <a:bodyPr/>
+          <a:bodyPr numCol="1"/>
           <a:lstStyle/>
           <a:p>
             <a:endParaRPr lang="en-US"/>
@@ -1797,12 +1797,12 @@
             <a:spLocks noGrp="1"/>
           </p:cNvSpPr>
           <p:nvPr>
-            <p:ph type="sldNum" sz="quarter" idx="12"/>
+            <p:ph idx="12" sz="quarter" type="sldNum"/>
           </p:nvPr>
         </p:nvSpPr>
         <p:spPr/>
         <p:txBody>
-          <a:bodyPr/>
+          <a:bodyPr numCol="1"/>
           <a:lstStyle/>
           <a:p>
             <a:fld id="{B6F15528-21DE-4FAA-801E-634DDDAF4B2B}" type="slidenum">
@@ -1823,7 +1823,7 @@
 </file>
 
 <file path=ppt/slideLayouts/slideLayout6.xml><?xml version="1.0" encoding="utf-8"?>
-<p:sldLayout xmlns:a="http://schemas.openxmlformats.org/drawingml/2006/main" xmlns:r="http://schemas.openxmlformats.org/officeDocument/2006/relationships" xmlns:p="http://schemas.openxmlformats.org/presentationml/2006/main" type="titleOnly" preserve="1">
+<p:sldLayout xmlns:a="http://schemas.openxmlformats.org/drawingml/2006/main" xmlns:r="http://schemas.openxmlformats.org/officeDocument/2006/relationships" xmlns:p="http://schemas.openxmlformats.org/presentationml/2006/main" preserve="1" type="titleOnly">
   <p:cSld name="Title Only">
     <p:spTree>
       <p:nvGrpSpPr>
@@ -1851,7 +1851,7 @@
         </p:nvSpPr>
         <p:spPr/>
         <p:txBody>
-          <a:bodyPr/>
+          <a:bodyPr numCol="1"/>
           <a:lstStyle/>
           <a:p>
             <a:r>
@@ -1869,12 +1869,12 @@
             <a:spLocks noGrp="1"/>
           </p:cNvSpPr>
           <p:nvPr>
-            <p:ph type="dt" sz="half" idx="10"/>
+            <p:ph idx="10" sz="half" type="dt"/>
           </p:nvPr>
         </p:nvSpPr>
         <p:spPr/>
         <p:txBody>
-          <a:bodyPr/>
+          <a:bodyPr numCol="1"/>
           <a:lstStyle/>
           <a:p>
             <a:fld id="{1D8BD707-D9CF-40AE-B4C6-C98DA3205C09}" type="datetimeFigureOut">
@@ -1893,12 +1893,12 @@
             <a:spLocks noGrp="1"/>
           </p:cNvSpPr>
           <p:nvPr>
-            <p:ph type="ftr" sz="quarter" idx="11"/>
+            <p:ph idx="11" sz="quarter" type="ftr"/>
           </p:nvPr>
         </p:nvSpPr>
         <p:spPr/>
         <p:txBody>
-          <a:bodyPr/>
+          <a:bodyPr numCol="1"/>
           <a:lstStyle/>
           <a:p>
             <a:endParaRPr lang="en-US"/>
@@ -1912,12 +1912,12 @@
             <a:spLocks noGrp="1"/>
           </p:cNvSpPr>
           <p:nvPr>
-            <p:ph type="sldNum" sz="quarter" idx="12"/>
+            <p:ph idx="12" sz="quarter" type="sldNum"/>
           </p:nvPr>
         </p:nvSpPr>
         <p:spPr/>
         <p:txBody>
-          <a:bodyPr/>
+          <a:bodyPr numCol="1"/>
           <a:lstStyle/>
           <a:p>
             <a:fld id="{B6F15528-21DE-4FAA-801E-634DDDAF4B2B}" type="slidenum">
@@ -1938,7 +1938,7 @@
 </file>
 
 <file path=ppt/slideLayouts/slideLayout7.xml><?xml version="1.0" encoding="utf-8"?>
-<p:sldLayout xmlns:a="http://schemas.openxmlformats.org/drawingml/2006/main" xmlns:r="http://schemas.openxmlformats.org/officeDocument/2006/relationships" xmlns:p="http://schemas.openxmlformats.org/presentationml/2006/main" type="blank" preserve="1">
+<p:sldLayout xmlns:a="http://schemas.openxmlformats.org/drawingml/2006/main" xmlns:r="http://schemas.openxmlformats.org/officeDocument/2006/relationships" xmlns:p="http://schemas.openxmlformats.org/presentationml/2006/main" preserve="1" type="blank">
   <p:cSld name="Blank">
     <p:spTree>
       <p:nvGrpSpPr>
@@ -1961,12 +1961,12 @@
             <a:spLocks noGrp="1"/>
           </p:cNvSpPr>
           <p:nvPr>
-            <p:ph type="dt" sz="half" idx="10"/>
+            <p:ph idx="10" sz="half" type="dt"/>
           </p:nvPr>
         </p:nvSpPr>
         <p:spPr/>
         <p:txBody>
-          <a:bodyPr/>
+          <a:bodyPr numCol="1"/>
           <a:lstStyle/>
           <a:p>
             <a:fld id="{1D8BD707-D9CF-40AE-B4C6-C98DA3205C09}" type="datetimeFigureOut">
@@ -1985,12 +1985,12 @@
             <a:spLocks noGrp="1"/>
           </p:cNvSpPr>
           <p:nvPr>
-            <p:ph type="ftr" sz="quarter" idx="11"/>
+            <p:ph idx="11" sz="quarter" type="ftr"/>
           </p:nvPr>
         </p:nvSpPr>
         <p:spPr/>
         <p:txBody>
-          <a:bodyPr/>
+          <a:bodyPr numCol="1"/>
           <a:lstStyle/>
           <a:p>
             <a:endParaRPr lang="en-US"/>
@@ -2004,12 +2004,12 @@
             <a:spLocks noGrp="1"/>
           </p:cNvSpPr>
           <p:nvPr>
-            <p:ph type="sldNum" sz="quarter" idx="12"/>
+            <p:ph idx="12" sz="quarter" type="sldNum"/>
           </p:nvPr>
         </p:nvSpPr>
         <p:spPr/>
         <p:txBody>
-          <a:bodyPr/>
+          <a:bodyPr numCol="1"/>
           <a:lstStyle/>
           <a:p>
             <a:fld id="{B6F15528-21DE-4FAA-801E-634DDDAF4B2B}" type="slidenum">
@@ -2030,7 +2030,7 @@
 </file>
 
 <file path=ppt/slideLayouts/slideLayout8.xml><?xml version="1.0" encoding="utf-8"?>
-<p:sldLayout xmlns:a="http://schemas.openxmlformats.org/drawingml/2006/main" xmlns:r="http://schemas.openxmlformats.org/officeDocument/2006/relationships" xmlns:p="http://schemas.openxmlformats.org/presentationml/2006/main" type="objTx" preserve="1">
+<p:sldLayout xmlns:a="http://schemas.openxmlformats.org/drawingml/2006/main" xmlns:r="http://schemas.openxmlformats.org/officeDocument/2006/relationships" xmlns:p="http://schemas.openxmlformats.org/presentationml/2006/main" preserve="1" type="objTx">
   <p:cSld name="Content with Caption">
     <p:spTree>
       <p:nvGrpSpPr>
@@ -2063,10 +2063,10 @@
           </a:xfrm>
         </p:spPr>
         <p:txBody>
-          <a:bodyPr anchor="b"/>
+          <a:bodyPr anchor="b" numCol="1"/>
           <a:lstStyle>
             <a:lvl1pPr algn="l">
-              <a:defRPr sz="2000" b="1"/>
+              <a:defRPr b="1" sz="2000"/>
             </a:lvl1pPr>
           </a:lstStyle>
           <a:p>
@@ -2095,7 +2095,7 @@
           </a:xfrm>
         </p:spPr>
         <p:txBody>
-          <a:bodyPr/>
+          <a:bodyPr numCol="1"/>
           <a:lstStyle>
             <a:lvl1pPr>
               <a:defRPr sz="3200"/>
@@ -2170,7 +2170,7 @@
             <a:spLocks noGrp="1"/>
           </p:cNvSpPr>
           <p:nvPr>
-            <p:ph type="body" sz="half" idx="2"/>
+            <p:ph idx="2" sz="half" type="body"/>
           </p:nvPr>
         </p:nvSpPr>
         <p:spPr>
@@ -2180,41 +2180,41 @@
           </a:xfrm>
         </p:spPr>
         <p:txBody>
-          <a:bodyPr/>
+          <a:bodyPr numCol="1"/>
           <a:lstStyle>
-            <a:lvl1pPr marL="0" indent="0">
+            <a:lvl1pPr indent="0" marL="0">
               <a:buNone/>
               <a:defRPr sz="1400"/>
             </a:lvl1pPr>
-            <a:lvl2pPr marL="457200" indent="0">
+            <a:lvl2pPr indent="0" marL="457200">
               <a:buNone/>
               <a:defRPr sz="1200"/>
             </a:lvl2pPr>
-            <a:lvl3pPr marL="914400" indent="0">
+            <a:lvl3pPr indent="0" marL="914400">
               <a:buNone/>
               <a:defRPr sz="1000"/>
             </a:lvl3pPr>
-            <a:lvl4pPr marL="1371600" indent="0">
+            <a:lvl4pPr indent="0" marL="1371600">
               <a:buNone/>
               <a:defRPr sz="900"/>
             </a:lvl4pPr>
-            <a:lvl5pPr marL="1828800" indent="0">
+            <a:lvl5pPr indent="0" marL="1828800">
               <a:buNone/>
               <a:defRPr sz="900"/>
             </a:lvl5pPr>
-            <a:lvl6pPr marL="2286000" indent="0">
+            <a:lvl6pPr indent="0" marL="2286000">
               <a:buNone/>
               <a:defRPr sz="900"/>
             </a:lvl6pPr>
-            <a:lvl7pPr marL="2743200" indent="0">
+            <a:lvl7pPr indent="0" marL="2743200">
               <a:buNone/>
               <a:defRPr sz="900"/>
             </a:lvl7pPr>
-            <a:lvl8pPr marL="3200400" indent="0">
+            <a:lvl8pPr indent="0" marL="3200400">
               <a:buNone/>
               <a:defRPr sz="900"/>
             </a:lvl8pPr>
-            <a:lvl9pPr marL="3657600" indent="0">
+            <a:lvl9pPr indent="0" marL="3657600">
               <a:buNone/>
               <a:defRPr sz="900"/>
             </a:lvl9pPr>
@@ -2235,12 +2235,12 @@
             <a:spLocks noGrp="1"/>
           </p:cNvSpPr>
           <p:nvPr>
-            <p:ph type="dt" sz="half" idx="10"/>
+            <p:ph idx="10" sz="half" type="dt"/>
           </p:nvPr>
         </p:nvSpPr>
         <p:spPr/>
         <p:txBody>
-          <a:bodyPr/>
+          <a:bodyPr numCol="1"/>
           <a:lstStyle/>
           <a:p>
             <a:fld id="{1D8BD707-D9CF-40AE-B4C6-C98DA3205C09}" type="datetimeFigureOut">
@@ -2259,12 +2259,12 @@
             <a:spLocks noGrp="1"/>
           </p:cNvSpPr>
           <p:nvPr>
-            <p:ph type="ftr" sz="quarter" idx="11"/>
+            <p:ph idx="11" sz="quarter" type="ftr"/>
           </p:nvPr>
         </p:nvSpPr>
         <p:spPr/>
         <p:txBody>
-          <a:bodyPr/>
+          <a:bodyPr numCol="1"/>
           <a:lstStyle/>
           <a:p>
             <a:endParaRPr lang="en-US"/>
@@ -2278,12 +2278,12 @@
             <a:spLocks noGrp="1"/>
           </p:cNvSpPr>
           <p:nvPr>
-            <p:ph type="sldNum" sz="quarter" idx="12"/>
+            <p:ph idx="12" sz="quarter" type="sldNum"/>
           </p:nvPr>
         </p:nvSpPr>
         <p:spPr/>
         <p:txBody>
-          <a:bodyPr/>
+          <a:bodyPr numCol="1"/>
           <a:lstStyle/>
           <a:p>
             <a:fld id="{B6F15528-21DE-4FAA-801E-634DDDAF4B2B}" type="slidenum">
@@ -2304,7 +2304,7 @@
 </file>
 
 <file path=ppt/slideLayouts/slideLayout9.xml><?xml version="1.0" encoding="utf-8"?>
-<p:sldLayout xmlns:a="http://schemas.openxmlformats.org/drawingml/2006/main" xmlns:r="http://schemas.openxmlformats.org/officeDocument/2006/relationships" xmlns:p="http://schemas.openxmlformats.org/presentationml/2006/main" type="picTx" preserve="1">
+<p:sldLayout xmlns:a="http://schemas.openxmlformats.org/drawingml/2006/main" xmlns:r="http://schemas.openxmlformats.org/officeDocument/2006/relationships" xmlns:p="http://schemas.openxmlformats.org/presentationml/2006/main" preserve="1" type="picTx">
   <p:cSld name="Picture with Caption">
     <p:spTree>
       <p:nvGrpSpPr>
@@ -2337,10 +2337,10 @@
           </a:xfrm>
         </p:spPr>
         <p:txBody>
-          <a:bodyPr anchor="b"/>
+          <a:bodyPr anchor="b" numCol="1"/>
           <a:lstStyle>
             <a:lvl1pPr algn="l">
-              <a:defRPr sz="2000" b="1"/>
+              <a:defRPr b="1" sz="2000"/>
             </a:lvl1pPr>
           </a:lstStyle>
           <a:p>
@@ -2359,7 +2359,7 @@
             <a:spLocks noGrp="1"/>
           </p:cNvSpPr>
           <p:nvPr>
-            <p:ph type="pic" idx="1"/>
+            <p:ph idx="1" type="pic"/>
           </p:nvPr>
         </p:nvSpPr>
         <p:spPr>
@@ -2369,41 +2369,41 @@
           </a:xfrm>
         </p:spPr>
         <p:txBody>
-          <a:bodyPr/>
+          <a:bodyPr numCol="1"/>
           <a:lstStyle>
-            <a:lvl1pPr marL="0" indent="0">
+            <a:lvl1pPr indent="0" marL="0">
               <a:buNone/>
               <a:defRPr sz="3200"/>
             </a:lvl1pPr>
-            <a:lvl2pPr marL="457200" indent="0">
+            <a:lvl2pPr indent="0" marL="457200">
               <a:buNone/>
               <a:defRPr sz="2800"/>
             </a:lvl2pPr>
-            <a:lvl3pPr marL="914400" indent="0">
+            <a:lvl3pPr indent="0" marL="914400">
               <a:buNone/>
               <a:defRPr sz="2400"/>
             </a:lvl3pPr>
-            <a:lvl4pPr marL="1371600" indent="0">
+            <a:lvl4pPr indent="0" marL="1371600">
               <a:buNone/>
               <a:defRPr sz="2000"/>
             </a:lvl4pPr>
-            <a:lvl5pPr marL="1828800" indent="0">
+            <a:lvl5pPr indent="0" marL="1828800">
               <a:buNone/>
               <a:defRPr sz="2000"/>
             </a:lvl5pPr>
-            <a:lvl6pPr marL="2286000" indent="0">
+            <a:lvl6pPr indent="0" marL="2286000">
               <a:buNone/>
               <a:defRPr sz="2000"/>
             </a:lvl6pPr>
-            <a:lvl7pPr marL="2743200" indent="0">
+            <a:lvl7pPr indent="0" marL="2743200">
               <a:buNone/>
               <a:defRPr sz="2000"/>
             </a:lvl7pPr>
-            <a:lvl8pPr marL="3200400" indent="0">
+            <a:lvl8pPr indent="0" marL="3200400">
               <a:buNone/>
               <a:defRPr sz="2000"/>
             </a:lvl8pPr>
-            <a:lvl9pPr marL="3657600" indent="0">
+            <a:lvl9pPr indent="0" marL="3657600">
               <a:buNone/>
               <a:defRPr sz="2000"/>
             </a:lvl9pPr>
@@ -2420,7 +2420,7 @@
             <a:spLocks noGrp="1"/>
           </p:cNvSpPr>
           <p:nvPr>
-            <p:ph type="body" sz="half" idx="2"/>
+            <p:ph idx="2" sz="half" type="body"/>
           </p:nvPr>
         </p:nvSpPr>
         <p:spPr>
@@ -2430,41 +2430,41 @@
           </a:xfrm>
         </p:spPr>
         <p:txBody>
-          <a:bodyPr/>
+          <a:bodyPr numCol="1"/>
           <a:lstStyle>
-            <a:lvl1pPr marL="0" indent="0">
+            <a:lvl1pPr indent="0" marL="0">
               <a:buNone/>
               <a:defRPr sz="1400"/>
             </a:lvl1pPr>
-            <a:lvl2pPr marL="457200" indent="0">
+            <a:lvl2pPr indent="0" marL="457200">
               <a:buNone/>
               <a:defRPr sz="1200"/>
             </a:lvl2pPr>
-            <a:lvl3pPr marL="914400" indent="0">
+            <a:lvl3pPr indent="0" marL="914400">
               <a:buNone/>
               <a:defRPr sz="1000"/>
             </a:lvl3pPr>
-            <a:lvl4pPr marL="1371600" indent="0">
+            <a:lvl4pPr indent="0" marL="1371600">
               <a:buNone/>
               <a:defRPr sz="900"/>
             </a:lvl4pPr>
-            <a:lvl5pPr marL="1828800" indent="0">
+            <a:lvl5pPr indent="0" marL="1828800">
               <a:buNone/>
               <a:defRPr sz="900"/>
             </a:lvl5pPr>
-            <a:lvl6pPr marL="2286000" indent="0">
+            <a:lvl6pPr indent="0" marL="2286000">
               <a:buNone/>
               <a:defRPr sz="900"/>
             </a:lvl6pPr>
-            <a:lvl7pPr marL="2743200" indent="0">
+            <a:lvl7pPr indent="0" marL="2743200">
               <a:buNone/>
               <a:defRPr sz="900"/>
             </a:lvl7pPr>
-            <a:lvl8pPr marL="3200400" indent="0">
+            <a:lvl8pPr indent="0" marL="3200400">
               <a:buNone/>
               <a:defRPr sz="900"/>
             </a:lvl8pPr>
-            <a:lvl9pPr marL="3657600" indent="0">
+            <a:lvl9pPr indent="0" marL="3657600">
               <a:buNone/>
               <a:defRPr sz="900"/>
             </a:lvl9pPr>
@@ -2485,12 +2485,12 @@
             <a:spLocks noGrp="1"/>
           </p:cNvSpPr>
           <p:nvPr>
-            <p:ph type="dt" sz="half" idx="10"/>
+            <p:ph idx="10" sz="half" type="dt"/>
           </p:nvPr>
         </p:nvSpPr>
         <p:spPr/>
         <p:txBody>
-          <a:bodyPr/>
+          <a:bodyPr numCol="1"/>
           <a:lstStyle/>
           <a:p>
             <a:fld id="{1D8BD707-D9CF-40AE-B4C6-C98DA3205C09}" type="datetimeFigureOut">
@@ -2509,12 +2509,12 @@
             <a:spLocks noGrp="1"/>
           </p:cNvSpPr>
           <p:nvPr>
-            <p:ph type="ftr" sz="quarter" idx="11"/>
+            <p:ph idx="11" sz="quarter" type="ftr"/>
           </p:nvPr>
         </p:nvSpPr>
         <p:spPr/>
         <p:txBody>
-          <a:bodyPr/>
+          <a:bodyPr numCol="1"/>
           <a:lstStyle/>
           <a:p>
             <a:endParaRPr lang="en-US"/>
@@ -2528,12 +2528,12 @@
             <a:spLocks noGrp="1"/>
           </p:cNvSpPr>
           <p:nvPr>
-            <p:ph type="sldNum" sz="quarter" idx="12"/>
+            <p:ph idx="12" sz="quarter" type="sldNum"/>
           </p:nvPr>
         </p:nvSpPr>
         <p:spPr/>
         <p:txBody>
-          <a:bodyPr/>
+          <a:bodyPr numCol="1"/>
           <a:lstStyle/>
           <a:p>
             <a:fld id="{B6F15528-21DE-4FAA-801E-634DDDAF4B2B}" type="slidenum">
@@ -2595,7 +2595,7 @@
           </a:prstGeom>
         </p:spPr>
         <p:txBody>
-          <a:bodyPr vert="horz" lIns="91440" tIns="45720" rIns="91440" bIns="45720" rtlCol="0" anchor="ctr">
+          <a:bodyPr anchor="ctr" bIns="45720" lIns="91440" numCol="1" rIns="91440" rtlCol="0" tIns="45720" vert="horz">
             <a:normAutofit/>
           </a:bodyPr>
           <a:lstStyle/>
@@ -2615,7 +2615,7 @@
             <a:spLocks noGrp="1"/>
           </p:cNvSpPr>
           <p:nvPr>
-            <p:ph type="body" idx="1"/>
+            <p:ph idx="1" type="body"/>
           </p:nvPr>
         </p:nvSpPr>
         <p:spPr>
@@ -2628,7 +2628,7 @@
           </a:prstGeom>
         </p:spPr>
         <p:txBody>
-          <a:bodyPr vert="horz" lIns="91440" tIns="45720" rIns="91440" bIns="45720" rtlCol="0">
+          <a:bodyPr bIns="45720" lIns="91440" numCol="1" rIns="91440" rtlCol="0" tIns="45720" vert="horz">
             <a:normAutofit/>
           </a:bodyPr>
           <a:lstStyle/>
@@ -2677,7 +2677,7 @@
             <a:spLocks noGrp="1"/>
           </p:cNvSpPr>
           <p:nvPr>
-            <p:ph type="dt" sz="half" idx="2"/>
+            <p:ph idx="2" sz="half" type="dt"/>
           </p:nvPr>
         </p:nvSpPr>
         <p:spPr>
@@ -2690,7 +2690,7 @@
           </a:prstGeom>
         </p:spPr>
         <p:txBody>
-          <a:bodyPr vert="horz" lIns="91440" tIns="45720" rIns="91440" bIns="45720" rtlCol="0" anchor="ctr"/>
+          <a:bodyPr anchor="ctr" bIns="45720" lIns="91440" numCol="1" rIns="91440" rtlCol="0" tIns="45720" vert="horz"/>
           <a:lstStyle>
             <a:lvl1pPr algn="l">
               <a:defRPr sz="1200">
@@ -2719,7 +2719,7 @@
             <a:spLocks noGrp="1"/>
           </p:cNvSpPr>
           <p:nvPr>
-            <p:ph type="ftr" sz="quarter" idx="3"/>
+            <p:ph idx="3" sz="quarter" type="ftr"/>
           </p:nvPr>
         </p:nvSpPr>
         <p:spPr>
@@ -2732,7 +2732,7 @@
           </a:prstGeom>
         </p:spPr>
         <p:txBody>
-          <a:bodyPr vert="horz" lIns="91440" tIns="45720" rIns="91440" bIns="45720" rtlCol="0" anchor="ctr"/>
+          <a:bodyPr anchor="ctr" bIns="45720" lIns="91440" numCol="1" rIns="91440" rtlCol="0" tIns="45720" vert="horz"/>
           <a:lstStyle>
             <a:lvl1pPr algn="ctr">
               <a:defRPr sz="1200">
@@ -2756,7 +2756,7 @@
             <a:spLocks noGrp="1"/>
           </p:cNvSpPr>
           <p:nvPr>
-            <p:ph type="sldNum" sz="quarter" idx="4"/>
+            <p:ph idx="4" sz="quarter" type="sldNum"/>
           </p:nvPr>
         </p:nvSpPr>
         <p:spPr>
@@ -2769,7 +2769,7 @@
           </a:prstGeom>
         </p:spPr>
         <p:txBody>
-          <a:bodyPr vert="horz" lIns="91440" tIns="45720" rIns="91440" bIns="45720" rtlCol="0" anchor="ctr"/>
+          <a:bodyPr anchor="ctr" bIns="45720" lIns="91440" numCol="1" rIns="91440" rtlCol="0" tIns="45720" vert="horz"/>
           <a:lstStyle>
             <a:lvl1pPr algn="r">
               <a:defRPr sz="1200">
@@ -2793,28 +2793,28 @@
       </p:sp>
     </p:spTree>
   </p:cSld>
-  <p:clrMap bg1="lt1" tx1="dk1" bg2="lt2" tx2="dk2" accent1="accent1" accent2="accent2" accent3="accent3" accent4="accent4" accent5="accent5" accent6="accent6" hlink="hlink" folHlink="folHlink"/>
+  <p:clrMap accent1="accent1" accent2="accent2" accent3="accent3" accent4="accent4" accent5="accent5" accent6="accent6" bg1="lt1" bg2="lt2" folHlink="folHlink" hlink="hlink" tx1="dk1" tx2="dk2"/>
   <p:sldLayoutIdLst>
-    <p:sldLayoutId id="2147483649" r:id="rId1"/>
-    <p:sldLayoutId id="2147483650" r:id="rId2"/>
-    <p:sldLayoutId id="2147483651" r:id="rId3"/>
-    <p:sldLayoutId id="2147483652" r:id="rId4"/>
-    <p:sldLayoutId id="2147483653" r:id="rId5"/>
-    <p:sldLayoutId id="2147483654" r:id="rId6"/>
-    <p:sldLayoutId id="2147483655" r:id="rId7"/>
-    <p:sldLayoutId id="2147483656" r:id="rId8"/>
-    <p:sldLayoutId id="2147483657" r:id="rId9"/>
-    <p:sldLayoutId id="2147483658" r:id="rId10"/>
-    <p:sldLayoutId id="2147483659" r:id="rId11"/>
+    <p:sldLayoutId id="2147483648" r:id="rId2"/>
+    <p:sldLayoutId id="2147483649" r:id="rId3"/>
+    <p:sldLayoutId id="2147483650" r:id="rId4"/>
+    <p:sldLayoutId id="2147483651" r:id="rId5"/>
+    <p:sldLayoutId id="2147483652" r:id="rId6"/>
+    <p:sldLayoutId id="2147483653" r:id="rId7"/>
+    <p:sldLayoutId id="2147483654" r:id="rId8"/>
+    <p:sldLayoutId id="2147483655" r:id="rId9"/>
+    <p:sldLayoutId id="2147483656" r:id="rId10"/>
+    <p:sldLayoutId id="2147483657" r:id="rId11"/>
+    <p:sldLayoutId id="2147483658" r:id="rId12"/>
   </p:sldLayoutIdLst>
   <p:txStyles>
     <p:titleStyle>
-      <a:lvl1pPr algn="ctr" defTabSz="914400" rtl="0" eaLnBrk="1" latinLnBrk="0" hangingPunct="1">
+      <a:lvl1pPr algn="ctr" defTabSz="914400" eaLnBrk="1" hangingPunct="1" latinLnBrk="0" rtl="0">
         <a:spcBef>
           <a:spcPct val="0"/>
         </a:spcBef>
         <a:buNone/>
-        <a:defRPr sz="4400" kern="1200">
+        <a:defRPr kern="1200" sz="4400">
           <a:solidFill>
             <a:schemeClr val="tx1"/>
           </a:solidFill>
@@ -2825,13 +2825,13 @@
       </a:lvl1pPr>
     </p:titleStyle>
     <p:bodyStyle>
-      <a:lvl1pPr marL="342900" indent="-342900" algn="l" defTabSz="914400" rtl="0" eaLnBrk="1" latinLnBrk="0" hangingPunct="1">
+      <a:lvl1pPr algn="l" defTabSz="914400" eaLnBrk="1" hangingPunct="1" indent="-342900" latinLnBrk="0" marL="342900" rtl="0">
         <a:spcBef>
           <a:spcPct val="20000"/>
         </a:spcBef>
-        <a:buFont typeface="Arial" pitchFamily="34" charset="0"/>
+        <a:buFont charset="0" pitchFamily="34" typeface="Arial"/>
         <a:buChar char="•"/>
-        <a:defRPr sz="3200" kern="1200">
+        <a:defRPr kern="1200" sz="3200">
           <a:solidFill>
             <a:schemeClr val="tx1"/>
           </a:solidFill>
@@ -2840,13 +2840,13 @@
           <a:cs typeface="+mn-cs"/>
         </a:defRPr>
       </a:lvl1pPr>
-      <a:lvl2pPr marL="742950" indent="-285750" algn="l" defTabSz="914400" rtl="0" eaLnBrk="1" latinLnBrk="0" hangingPunct="1">
+      <a:lvl2pPr algn="l" defTabSz="914400" eaLnBrk="1" hangingPunct="1" indent="-285750" latinLnBrk="0" marL="742950" rtl="0">
         <a:spcBef>
           <a:spcPct val="20000"/>
         </a:spcBef>
-        <a:buFont typeface="Arial" pitchFamily="34" charset="0"/>
+        <a:buFont charset="0" pitchFamily="34" typeface="Arial"/>
         <a:buChar char="–"/>
-        <a:defRPr sz="2800" kern="1200">
+        <a:defRPr kern="1200" sz="2800">
           <a:solidFill>
             <a:schemeClr val="tx1"/>
           </a:solidFill>
@@ -2855,13 +2855,13 @@
           <a:cs typeface="+mn-cs"/>
         </a:defRPr>
       </a:lvl2pPr>
-      <a:lvl3pPr marL="1143000" indent="-228600" algn="l" defTabSz="914400" rtl="0" eaLnBrk="1" latinLnBrk="0" hangingPunct="1">
+      <a:lvl3pPr algn="l" defTabSz="914400" eaLnBrk="1" hangingPunct="1" indent="-228600" latinLnBrk="0" marL="1143000" rtl="0">
         <a:spcBef>
           <a:spcPct val="20000"/>
         </a:spcBef>
-        <a:buFont typeface="Arial" pitchFamily="34" charset="0"/>
+        <a:buFont charset="0" pitchFamily="34" typeface="Arial"/>
         <a:buChar char="•"/>
-        <a:defRPr sz="2400" kern="1200">
+        <a:defRPr kern="1200" sz="2400">
           <a:solidFill>
             <a:schemeClr val="tx1"/>
           </a:solidFill>
@@ -2870,13 +2870,13 @@
           <a:cs typeface="+mn-cs"/>
         </a:defRPr>
       </a:lvl3pPr>
-      <a:lvl4pPr marL="1600200" indent="-228600" algn="l" defTabSz="914400" rtl="0" eaLnBrk="1" latinLnBrk="0" hangingPunct="1">
+      <a:lvl4pPr algn="l" defTabSz="914400" eaLnBrk="1" hangingPunct="1" indent="-228600" latinLnBrk="0" marL="1600200" rtl="0">
         <a:spcBef>
           <a:spcPct val="20000"/>
         </a:spcBef>
-        <a:buFont typeface="Arial" pitchFamily="34" charset="0"/>
+        <a:buFont charset="0" pitchFamily="34" typeface="Arial"/>
         <a:buChar char="–"/>
-        <a:defRPr sz="2000" kern="1200">
+        <a:defRPr kern="1200" sz="2000">
           <a:solidFill>
             <a:schemeClr val="tx1"/>
           </a:solidFill>
@@ -2885,13 +2885,13 @@
           <a:cs typeface="+mn-cs"/>
         </a:defRPr>
       </a:lvl4pPr>
-      <a:lvl5pPr marL="2057400" indent="-228600" algn="l" defTabSz="914400" rtl="0" eaLnBrk="1" latinLnBrk="0" hangingPunct="1">
+      <a:lvl5pPr algn="l" defTabSz="914400" eaLnBrk="1" hangingPunct="1" indent="-228600" latinLnBrk="0" marL="2057400" rtl="0">
         <a:spcBef>
           <a:spcPct val="20000"/>
         </a:spcBef>
-        <a:buFont typeface="Arial" pitchFamily="34" charset="0"/>
+        <a:buFont charset="0" pitchFamily="34" typeface="Arial"/>
         <a:buChar char="»"/>
-        <a:defRPr sz="2000" kern="1200">
+        <a:defRPr kern="1200" sz="2000">
           <a:solidFill>
             <a:schemeClr val="tx1"/>
           </a:solidFill>
@@ -2900,13 +2900,13 @@
           <a:cs typeface="+mn-cs"/>
         </a:defRPr>
       </a:lvl5pPr>
-      <a:lvl6pPr marL="2514600" indent="-228600" algn="l" defTabSz="914400" rtl="0" eaLnBrk="1" latinLnBrk="0" hangingPunct="1">
+      <a:lvl6pPr algn="l" defTabSz="914400" eaLnBrk="1" hangingPunct="1" indent="-228600" latinLnBrk="0" marL="2514600" rtl="0">
         <a:spcBef>
           <a:spcPct val="20000"/>
         </a:spcBef>
-        <a:buFont typeface="Arial" pitchFamily="34" charset="0"/>
+        <a:buFont charset="0" pitchFamily="34" typeface="Arial"/>
         <a:buChar char="•"/>
-        <a:defRPr sz="2000" kern="1200">
+        <a:defRPr kern="1200" sz="2000">
           <a:solidFill>
             <a:schemeClr val="tx1"/>
           </a:solidFill>
@@ -2915,13 +2915,13 @@
           <a:cs typeface="+mn-cs"/>
         </a:defRPr>
       </a:lvl6pPr>
-      <a:lvl7pPr marL="2971800" indent="-228600" algn="l" defTabSz="914400" rtl="0" eaLnBrk="1" latinLnBrk="0" hangingPunct="1">
+      <a:lvl7pPr algn="l" defTabSz="914400" eaLnBrk="1" hangingPunct="1" indent="-228600" latinLnBrk="0" marL="2971800" rtl="0">
         <a:spcBef>
           <a:spcPct val="20000"/>
         </a:spcBef>
-        <a:buFont typeface="Arial" pitchFamily="34" charset="0"/>
+        <a:buFont charset="0" pitchFamily="34" typeface="Arial"/>
         <a:buChar char="•"/>
-        <a:defRPr sz="2000" kern="1200">
+        <a:defRPr kern="1200" sz="2000">
           <a:solidFill>
             <a:schemeClr val="tx1"/>
           </a:solidFill>
@@ -2930,13 +2930,13 @@
           <a:cs typeface="+mn-cs"/>
         </a:defRPr>
       </a:lvl7pPr>
-      <a:lvl8pPr marL="3429000" indent="-228600" algn="l" defTabSz="914400" rtl="0" eaLnBrk="1" latinLnBrk="0" hangingPunct="1">
+      <a:lvl8pPr algn="l" defTabSz="914400" eaLnBrk="1" hangingPunct="1" indent="-228600" latinLnBrk="0" marL="3429000" rtl="0">
         <a:spcBef>
           <a:spcPct val="20000"/>
         </a:spcBef>
-        <a:buFont typeface="Arial" pitchFamily="34" charset="0"/>
+        <a:buFont charset="0" pitchFamily="34" typeface="Arial"/>
         <a:buChar char="•"/>
-        <a:defRPr sz="2000" kern="1200">
+        <a:defRPr kern="1200" sz="2000">
           <a:solidFill>
             <a:schemeClr val="tx1"/>
           </a:solidFill>
@@ -2945,13 +2945,13 @@
           <a:cs typeface="+mn-cs"/>
         </a:defRPr>
       </a:lvl8pPr>
-      <a:lvl9pPr marL="3886200" indent="-228600" algn="l" defTabSz="914400" rtl="0" eaLnBrk="1" latinLnBrk="0" hangingPunct="1">
+      <a:lvl9pPr algn="l" defTabSz="914400" eaLnBrk="1" hangingPunct="1" indent="-228600" latinLnBrk="0" marL="3886200" rtl="0">
         <a:spcBef>
           <a:spcPct val="20000"/>
         </a:spcBef>
-        <a:buFont typeface="Arial" pitchFamily="34" charset="0"/>
+        <a:buFont charset="0" pitchFamily="34" typeface="Arial"/>
         <a:buChar char="•"/>
-        <a:defRPr sz="2000" kern="1200">
+        <a:defRPr kern="1200" sz="2000">
           <a:solidFill>
             <a:schemeClr val="tx1"/>
           </a:solidFill>
@@ -2965,8 +2965,8 @@
       <a:defPPr>
         <a:defRPr lang="en-US"/>
       </a:defPPr>
-      <a:lvl1pPr marL="0" algn="l" defTabSz="914400" rtl="0" eaLnBrk="1" latinLnBrk="0" hangingPunct="1">
-        <a:defRPr sz="1800" kern="1200">
+      <a:lvl1pPr algn="l" defTabSz="914400" eaLnBrk="1" hangingPunct="1" latinLnBrk="0" marL="0" rtl="0">
+        <a:defRPr kern="1200" sz="1800">
           <a:solidFill>
             <a:schemeClr val="tx1"/>
           </a:solidFill>
@@ -2975,8 +2975,8 @@
           <a:cs typeface="+mn-cs"/>
         </a:defRPr>
       </a:lvl1pPr>
-      <a:lvl2pPr marL="457200" algn="l" defTabSz="914400" rtl="0" eaLnBrk="1" latinLnBrk="0" hangingPunct="1">
-        <a:defRPr sz="1800" kern="1200">
+      <a:lvl2pPr algn="l" defTabSz="914400" eaLnBrk="1" hangingPunct="1" latinLnBrk="0" marL="457200" rtl="0">
+        <a:defRPr kern="1200" sz="1800">
           <a:solidFill>
             <a:schemeClr val="tx1"/>
           </a:solidFill>
@@ -2985,8 +2985,8 @@
           <a:cs typeface="+mn-cs"/>
         </a:defRPr>
       </a:lvl2pPr>
-      <a:lvl3pPr marL="914400" algn="l" defTabSz="914400" rtl="0" eaLnBrk="1" latinLnBrk="0" hangingPunct="1">
-        <a:defRPr sz="1800" kern="1200">
+      <a:lvl3pPr algn="l" defTabSz="914400" eaLnBrk="1" hangingPunct="1" latinLnBrk="0" marL="914400" rtl="0">
+        <a:defRPr kern="1200" sz="1800">
           <a:solidFill>
             <a:schemeClr val="tx1"/>
           </a:solidFill>
@@ -2995,8 +2995,8 @@
           <a:cs typeface="+mn-cs"/>
         </a:defRPr>
       </a:lvl3pPr>
-      <a:lvl4pPr marL="1371600" algn="l" defTabSz="914400" rtl="0" eaLnBrk="1" latinLnBrk="0" hangingPunct="1">
-        <a:defRPr sz="1800" kern="1200">
+      <a:lvl4pPr algn="l" defTabSz="914400" eaLnBrk="1" hangingPunct="1" latinLnBrk="0" marL="1371600" rtl="0">
+        <a:defRPr kern="1200" sz="1800">
           <a:solidFill>
             <a:schemeClr val="tx1"/>
           </a:solidFill>
@@ -3005,8 +3005,8 @@
           <a:cs typeface="+mn-cs"/>
         </a:defRPr>
       </a:lvl4pPr>
-      <a:lvl5pPr marL="1828800" algn="l" defTabSz="914400" rtl="0" eaLnBrk="1" latinLnBrk="0" hangingPunct="1">
-        <a:defRPr sz="1800" kern="1200">
+      <a:lvl5pPr algn="l" defTabSz="914400" eaLnBrk="1" hangingPunct="1" latinLnBrk="0" marL="1828800" rtl="0">
+        <a:defRPr kern="1200" sz="1800">
           <a:solidFill>
             <a:schemeClr val="tx1"/>
           </a:solidFill>
@@ -3015,8 +3015,8 @@
           <a:cs typeface="+mn-cs"/>
         </a:defRPr>
       </a:lvl5pPr>
-      <a:lvl6pPr marL="2286000" algn="l" defTabSz="914400" rtl="0" eaLnBrk="1" latinLnBrk="0" hangingPunct="1">
-        <a:defRPr sz="1800" kern="1200">
+      <a:lvl6pPr algn="l" defTabSz="914400" eaLnBrk="1" hangingPunct="1" latinLnBrk="0" marL="2286000" rtl="0">
+        <a:defRPr kern="1200" sz="1800">
           <a:solidFill>
             <a:schemeClr val="tx1"/>
           </a:solidFill>
@@ -3025,8 +3025,8 @@
           <a:cs typeface="+mn-cs"/>
         </a:defRPr>
       </a:lvl6pPr>
-      <a:lvl7pPr marL="2743200" algn="l" defTabSz="914400" rtl="0" eaLnBrk="1" latinLnBrk="0" hangingPunct="1">
-        <a:defRPr sz="1800" kern="1200">
+      <a:lvl7pPr algn="l" defTabSz="914400" eaLnBrk="1" hangingPunct="1" latinLnBrk="0" marL="2743200" rtl="0">
+        <a:defRPr kern="1200" sz="1800">
           <a:solidFill>
             <a:schemeClr val="tx1"/>
           </a:solidFill>
@@ -3035,8 +3035,8 @@
           <a:cs typeface="+mn-cs"/>
         </a:defRPr>
       </a:lvl7pPr>
-      <a:lvl8pPr marL="3200400" algn="l" defTabSz="914400" rtl="0" eaLnBrk="1" latinLnBrk="0" hangingPunct="1">
-        <a:defRPr sz="1800" kern="1200">
+      <a:lvl8pPr algn="l" defTabSz="914400" eaLnBrk="1" hangingPunct="1" latinLnBrk="0" marL="3200400" rtl="0">
+        <a:defRPr kern="1200" sz="1800">
           <a:solidFill>
             <a:schemeClr val="tx1"/>
           </a:solidFill>
@@ -3045,8 +3045,8 @@
           <a:cs typeface="+mn-cs"/>
         </a:defRPr>
       </a:lvl8pPr>
-      <a:lvl9pPr marL="3657600" algn="l" defTabSz="914400" rtl="0" eaLnBrk="1" latinLnBrk="0" hangingPunct="1">
-        <a:defRPr sz="1800" kern="1200">
+      <a:lvl9pPr algn="l" defTabSz="914400" eaLnBrk="1" hangingPunct="1" latinLnBrk="0" marL="3657600" rtl="0">
+        <a:defRPr kern="1200" sz="1800">
           <a:solidFill>
             <a:schemeClr val="tx1"/>
           </a:solidFill>
@@ -3079,21 +3079,21 @@
       </p:grpSpPr>
       <p:sp>
         <p:nvSpPr>
-          <p:cNvPr name="Freeform 2" id="2"/>
+          <p:cNvPr id="2" name="Freeform 2"/>
           <p:cNvSpPr/>
           <p:nvPr/>
         </p:nvSpPr>
         <p:spPr>
-          <a:xfrm flipH="false" flipV="false" rot="5400000">
-            <a:off x="-1566000" y="1566000"/>
-            <a:ext cx="10692000" cy="7560000"/>
+          <a:xfrm rot="5400000">
+            <a:off x="-1576369" y="1576373"/>
+            <a:ext cx="10692003" cy="7559878"/>
           </a:xfrm>
           <a:custGeom>
             <a:avLst/>
             <a:gdLst/>
             <a:ahLst/>
             <a:cxnLst/>
-            <a:rect r="r" b="b" t="t" l="l"/>
+            <a:rect b="b" l="l" r="r" t="t"/>
             <a:pathLst>
               <a:path h="7560000" w="10692000">
                 <a:moveTo>
@@ -3118,14 +3118,14 @@
           <a:blipFill>
             <a:blip r:embed="rId2"/>
             <a:stretch>
-              <a:fillRect l="-4132" t="-1511" r="-4132" b="-1511"/>
+              <a:fillRect b="-1511" l="-4132" r="-4132" t="-1511"/>
             </a:stretch>
           </a:blipFill>
         </p:spPr>
       </p:sp>
       <p:sp>
         <p:nvSpPr>
-          <p:cNvPr name="AutoShape 3" id="3"/>
+          <p:cNvPr id="3" name="AutoShape 3"/>
           <p:cNvSpPr/>
           <p:nvPr/>
         </p:nvSpPr>
@@ -3142,19 +3142,19 @@
               <a:srgbClr val="FFFFFF"/>
             </a:solidFill>
             <a:prstDash val="solid"/>
-            <a:headEnd type="none" len="sm" w="sm"/>
-            <a:tailEnd type="none" len="sm" w="sm"/>
+            <a:headEnd len="sm" type="none" w="sm"/>
+            <a:tailEnd len="sm" type="none" w="sm"/>
           </a:ln>
         </p:spPr>
       </p:sp>
       <p:grpSp>
         <p:nvGrpSpPr>
-          <p:cNvPr name="Group 4" id="4"/>
+          <p:cNvPr id="4" name="Group 4"/>
           <p:cNvGrpSpPr/>
           <p:nvPr/>
         </p:nvGrpSpPr>
         <p:grpSpPr>
-          <a:xfrm rot="0">
+          <a:xfrm>
             <a:off x="404684" y="1862589"/>
             <a:ext cx="3271661" cy="2190602"/>
             <a:chOff x="0" y="0"/>
@@ -3163,12 +3163,12 @@
         </p:grpSpPr>
         <p:sp>
           <p:nvSpPr>
-            <p:cNvPr name="Freeform 5" id="5"/>
+            <p:cNvPr id="5" name="Freeform 5"/>
             <p:cNvSpPr/>
             <p:nvPr/>
           </p:nvSpPr>
           <p:spPr>
-            <a:xfrm flipH="false" flipV="false" rot="0">
+            <a:xfrm>
               <a:off x="0" y="0"/>
               <a:ext cx="1172489" cy="785062"/>
             </a:xfrm>
@@ -3177,7 +3177,7 @@
               <a:gdLst/>
               <a:ahLst/>
               <a:cxnLst/>
-              <a:rect r="r" b="b" t="t" l="l"/>
+              <a:rect b="b" l="l" r="r" t="t"/>
               <a:pathLst>
                 <a:path h="785062" w="1172489">
                   <a:moveTo>
@@ -3239,7 +3239,7 @@
                 </a:path>
               </a:pathLst>
             </a:custGeom>
-            <a:ln w="19050" cap="rnd">
+            <a:ln cap="rnd" w="19050">
               <a:solidFill>
                 <a:srgbClr val="FFFFFF"/>
               </a:solidFill>
@@ -3250,8 +3250,8 @@
         </p:sp>
         <p:sp>
           <p:nvSpPr>
-            <p:cNvPr name="TextBox 6" id="6"/>
-            <p:cNvSpPr txBox="true"/>
+            <p:cNvPr id="6" name="TextBox 6"/>
+            <p:cNvSpPr txBox="1"/>
             <p:nvPr/>
           </p:nvSpPr>
           <p:spPr>
@@ -3264,7 +3264,7 @@
             </a:prstGeom>
           </p:spPr>
           <p:txBody>
-            <a:bodyPr anchor="ctr" rtlCol="false" tIns="50800" lIns="50800" bIns="50800" rIns="50800"/>
+            <a:bodyPr anchor="ctr" bIns="50800" lIns="50800" numCol="1" rIns="50800" rtlCol="0" tIns="50800"/>
             <a:lstStyle/>
             <a:p>
               <a:pPr algn="ctr">
@@ -3278,12 +3278,12 @@
       </p:grpSp>
       <p:grpSp>
         <p:nvGrpSpPr>
-          <p:cNvPr name="Group 7" id="7"/>
+          <p:cNvPr id="7" name="Group 7"/>
           <p:cNvGrpSpPr/>
           <p:nvPr/>
         </p:nvGrpSpPr>
         <p:grpSpPr>
-          <a:xfrm rot="0">
+          <a:xfrm>
             <a:off x="404684" y="4298635"/>
             <a:ext cx="6750632" cy="2112310"/>
             <a:chOff x="0" y="0"/>
@@ -3292,12 +3292,12 @@
         </p:grpSpPr>
         <p:sp>
           <p:nvSpPr>
-            <p:cNvPr name="Freeform 8" id="8"/>
+            <p:cNvPr id="8" name="Freeform 8"/>
             <p:cNvSpPr/>
             <p:nvPr/>
           </p:nvSpPr>
           <p:spPr>
-            <a:xfrm flipH="false" flipV="false" rot="0">
+            <a:xfrm>
               <a:off x="0" y="0"/>
               <a:ext cx="2419274" cy="757004"/>
             </a:xfrm>
@@ -3306,7 +3306,7 @@
               <a:gdLst/>
               <a:ahLst/>
               <a:cxnLst/>
-              <a:rect r="r" b="b" t="t" l="l"/>
+              <a:rect b="b" l="l" r="r" t="t"/>
               <a:pathLst>
                 <a:path h="757004" w="2419274">
                   <a:moveTo>
@@ -3363,7 +3363,7 @@
                 </a:path>
               </a:pathLst>
             </a:custGeom>
-            <a:ln w="19050" cap="rnd">
+            <a:ln cap="rnd" w="19050">
               <a:solidFill>
                 <a:srgbClr val="FFFFFF"/>
               </a:solidFill>
@@ -3374,8 +3374,8 @@
         </p:sp>
         <p:sp>
           <p:nvSpPr>
-            <p:cNvPr name="TextBox 9" id="9"/>
-            <p:cNvSpPr txBox="true"/>
+            <p:cNvPr id="9" name="TextBox 9"/>
+            <p:cNvSpPr txBox="1"/>
             <p:nvPr/>
           </p:nvSpPr>
           <p:spPr>
@@ -3388,7 +3388,7 @@
             </a:prstGeom>
           </p:spPr>
           <p:txBody>
-            <a:bodyPr anchor="ctr" rtlCol="false" tIns="50800" lIns="50800" bIns="50800" rIns="50800"/>
+            <a:bodyPr anchor="ctr" bIns="50800" lIns="50800" numCol="1" rIns="50800" rtlCol="0" tIns="50800"/>
             <a:lstStyle/>
             <a:p>
               <a:pPr algn="ctr">
@@ -3402,12 +3402,12 @@
       </p:grpSp>
       <p:grpSp>
         <p:nvGrpSpPr>
-          <p:cNvPr name="Group 10" id="10"/>
+          <p:cNvPr id="10" name="Group 10"/>
           <p:cNvGrpSpPr/>
           <p:nvPr/>
         </p:nvGrpSpPr>
         <p:grpSpPr>
-          <a:xfrm rot="0">
+          <a:xfrm>
             <a:off x="417274" y="334527"/>
             <a:ext cx="2268000" cy="1334032"/>
             <a:chOff x="0" y="0"/>
@@ -3416,12 +3416,12 @@
         </p:grpSpPr>
         <p:sp>
           <p:nvSpPr>
-            <p:cNvPr name="Freeform 11" id="11"/>
+            <p:cNvPr id="11" name="Freeform 11"/>
             <p:cNvSpPr/>
             <p:nvPr/>
           </p:nvSpPr>
           <p:spPr>
-            <a:xfrm flipH="false" flipV="false" rot="0">
+            <a:xfrm>
               <a:off x="0" y="0"/>
               <a:ext cx="812800" cy="478087"/>
             </a:xfrm>
@@ -3430,7 +3430,7 @@
               <a:gdLst/>
               <a:ahLst/>
               <a:cxnLst/>
-              <a:rect r="r" b="b" t="t" l="l"/>
+              <a:rect b="b" l="l" r="r" t="t"/>
               <a:pathLst>
                 <a:path h="478087" w="812800">
                   <a:moveTo>
@@ -3492,7 +3492,7 @@
                 </a:path>
               </a:pathLst>
             </a:custGeom>
-            <a:ln w="19050" cap="rnd">
+            <a:ln cap="rnd" w="19050">
               <a:solidFill>
                 <a:srgbClr val="FFFFFF"/>
               </a:solidFill>
@@ -3503,8 +3503,8 @@
         </p:sp>
         <p:sp>
           <p:nvSpPr>
-            <p:cNvPr name="TextBox 12" id="12"/>
-            <p:cNvSpPr txBox="true"/>
+            <p:cNvPr id="12" name="TextBox 12"/>
+            <p:cNvSpPr txBox="1"/>
             <p:nvPr/>
           </p:nvSpPr>
           <p:spPr>
@@ -3517,7 +3517,7 @@
             </a:prstGeom>
           </p:spPr>
           <p:txBody>
-            <a:bodyPr anchor="ctr" rtlCol="false" tIns="50800" lIns="50800" bIns="50800" rIns="50800"/>
+            <a:bodyPr anchor="ctr" bIns="50800" lIns="50800" numCol="1" rIns="50800" rtlCol="0" tIns="50800"/>
             <a:lstStyle/>
             <a:p>
               <a:pPr algn="ctr">
@@ -3531,12 +3531,12 @@
       </p:grpSp>
       <p:grpSp>
         <p:nvGrpSpPr>
-          <p:cNvPr name="Group 13" id="13"/>
+          <p:cNvPr id="13" name="Group 13"/>
           <p:cNvGrpSpPr/>
           <p:nvPr/>
         </p:nvGrpSpPr>
         <p:grpSpPr>
-          <a:xfrm rot="0">
+          <a:xfrm>
             <a:off x="3883655" y="1874205"/>
             <a:ext cx="3271661" cy="2178985"/>
             <a:chOff x="0" y="0"/>
@@ -3545,12 +3545,12 @@
         </p:grpSpPr>
         <p:sp>
           <p:nvSpPr>
-            <p:cNvPr name="Freeform 14" id="14"/>
+            <p:cNvPr id="14" name="Freeform 14"/>
             <p:cNvSpPr/>
             <p:nvPr/>
           </p:nvSpPr>
           <p:spPr>
-            <a:xfrm flipH="false" flipV="false" rot="0">
+            <a:xfrm>
               <a:off x="0" y="0"/>
               <a:ext cx="1172489" cy="780899"/>
             </a:xfrm>
@@ -3559,7 +3559,7 @@
               <a:gdLst/>
               <a:ahLst/>
               <a:cxnLst/>
-              <a:rect r="r" b="b" t="t" l="l"/>
+              <a:rect b="b" l="l" r="r" t="t"/>
               <a:pathLst>
                 <a:path h="780899" w="1172489">
                   <a:moveTo>
@@ -3621,7 +3621,7 @@
                 </a:path>
               </a:pathLst>
             </a:custGeom>
-            <a:ln w="19050" cap="rnd">
+            <a:ln cap="rnd" w="19050">
               <a:solidFill>
                 <a:srgbClr val="FFFFFF"/>
               </a:solidFill>
@@ -3632,8 +3632,8 @@
         </p:sp>
         <p:sp>
           <p:nvSpPr>
-            <p:cNvPr name="TextBox 15" id="15"/>
-            <p:cNvSpPr txBox="true"/>
+            <p:cNvPr id="15" name="TextBox 15"/>
+            <p:cNvSpPr txBox="1"/>
             <p:nvPr/>
           </p:nvSpPr>
           <p:spPr>
@@ -3646,7 +3646,7 @@
             </a:prstGeom>
           </p:spPr>
           <p:txBody>
-            <a:bodyPr anchor="ctr" rtlCol="false" tIns="50800" lIns="50800" bIns="50800" rIns="50800"/>
+            <a:bodyPr anchor="ctr" bIns="50800" lIns="50800" numCol="1" rIns="50800" rtlCol="0" tIns="50800"/>
             <a:lstStyle/>
             <a:p>
               <a:pPr algn="ctr">
@@ -3660,14 +3660,14 @@
       </p:grpSp>
       <p:grpSp>
         <p:nvGrpSpPr>
-          <p:cNvPr name="Group 16" id="16"/>
+          <p:cNvPr id="16" name="Group 16"/>
           <p:cNvGrpSpPr>
             <a:grpSpLocks noChangeAspect="true"/>
           </p:cNvGrpSpPr>
           <p:nvPr/>
         </p:nvGrpSpPr>
         <p:grpSpPr>
-          <a:xfrm rot="0">
+          <a:xfrm>
             <a:off x="4969205" y="6742415"/>
             <a:ext cx="2002065" cy="2030603"/>
             <a:chOff x="0" y="0"/>
@@ -3676,12 +3676,12 @@
         </p:grpSpPr>
         <p:sp>
           <p:nvSpPr>
-            <p:cNvPr name="Freeform 17" id="17"/>
+            <p:cNvPr id="17" name="Freeform 17"/>
             <p:cNvSpPr/>
             <p:nvPr/>
           </p:nvSpPr>
           <p:spPr>
-            <a:xfrm flipH="false" flipV="false" rot="0">
+            <a:xfrm>
               <a:off x="123136" y="244952"/>
               <a:ext cx="11306283" cy="11266943"/>
             </a:xfrm>
@@ -3690,7 +3690,7 @@
               <a:gdLst/>
               <a:ahLst/>
               <a:cxnLst/>
-              <a:rect r="r" b="b" t="t" l="l"/>
+              <a:rect b="b" l="l" r="r" t="t"/>
               <a:pathLst>
                 <a:path h="11266943" w="11306283">
                   <a:moveTo>
@@ -3733,19 +3733,19 @@
             <a:blipFill>
               <a:blip r:embed="rId3"/>
               <a:stretch>
-                <a:fillRect l="-972" t="0" r="-972" b="0"/>
+                <a:fillRect b="0" l="-972" r="-972" t="0"/>
               </a:stretch>
             </a:blipFill>
           </p:spPr>
         </p:sp>
         <p:sp>
           <p:nvSpPr>
-            <p:cNvPr name="Freeform 18" id="18"/>
+            <p:cNvPr id="18" name="Freeform 18"/>
             <p:cNvSpPr/>
             <p:nvPr/>
           </p:nvSpPr>
           <p:spPr>
-            <a:xfrm flipH="false" flipV="false" rot="0">
+            <a:xfrm>
               <a:off x="0" y="0"/>
               <a:ext cx="11575567" cy="11745316"/>
             </a:xfrm>
@@ -3754,7 +3754,7 @@
               <a:gdLst/>
               <a:ahLst/>
               <a:cxnLst/>
-              <a:rect r="r" b="b" t="t" l="l"/>
+              <a:rect b="b" l="l" r="r" t="t"/>
               <a:pathLst>
                 <a:path h="11745316" w="11575567">
                   <a:moveTo>
@@ -3776,7 +3776,7 @@
             <a:blipFill>
               <a:blip r:embed="rId4"/>
               <a:stretch>
-                <a:fillRect l="-272" t="0" r="-272" b="0"/>
+                <a:fillRect b="0" l="-272" r="-272" t="0"/>
               </a:stretch>
             </a:blipFill>
           </p:spPr>
@@ -3784,21 +3784,21 @@
       </p:grpSp>
       <p:sp>
         <p:nvSpPr>
-          <p:cNvPr name="TextBox 19" id="19"/>
-          <p:cNvSpPr txBox="true"/>
+          <p:cNvPr id="19" name="TextBox 19"/>
+          <p:cNvSpPr txBox="1"/>
           <p:nvPr/>
         </p:nvSpPr>
         <p:spPr>
-          <a:xfrm rot="0">
-            <a:off x="588730" y="6496670"/>
-            <a:ext cx="4737846" cy="245745"/>
+          <a:xfrm>
+            <a:off x="3307422" y="6487829"/>
+            <a:ext cx="1112939" cy="245269"/>
           </a:xfrm>
           <a:prstGeom prst="rect">
             <a:avLst/>
           </a:prstGeom>
         </p:spPr>
         <p:txBody>
-          <a:bodyPr anchor="t" rtlCol="false" tIns="0" lIns="0" bIns="0" rIns="0">
+          <a:bodyPr anchor="t" bIns="0" lIns="0" numCol="1" rIns="0" rtlCol="0" tIns="0">
             <a:spAutoFit/>
           </a:bodyPr>
           <a:lstStyle/>
@@ -3809,7 +3809,7 @@
               </a:lnSpc>
             </a:pPr>
             <a:r>
-              <a:rPr lang="en-US" sz="1500" b="true">
+              <a:rPr b="1" lang="en-US" sz="1500">
                 <a:solidFill>
                   <a:srgbClr val="FFFFFF"/>
                 </a:solidFill>
@@ -3818,28 +3818,28 @@
                 <a:cs typeface="Agrandir Bold"/>
                 <a:sym typeface="Agrandir Bold"/>
               </a:rPr>
-              <a:t>Gráfico de Desempenho</a:t>
-            </a:r>
-          </a:p>
-        </p:txBody>
-      </p:sp>
-      <p:sp>
-        <p:nvSpPr>
-          <p:cNvPr name="TextBox 20" id="20"/>
-          <p:cNvSpPr txBox="true"/>
+              <a:t>GRÁFICOS</a:t>
+            </a:r>
+          </a:p>
+        </p:txBody>
+      </p:sp>
+      <p:sp>
+        <p:nvSpPr>
+          <p:cNvPr id="20" name="TextBox 20"/>
+          <p:cNvSpPr txBox="1"/>
           <p:nvPr/>
         </p:nvSpPr>
         <p:spPr>
-          <a:xfrm rot="0">
-            <a:off x="604186" y="9082263"/>
-            <a:ext cx="4737846" cy="245745"/>
+          <a:xfrm>
+            <a:off x="3151515" y="9310356"/>
+            <a:ext cx="1279179" cy="245269"/>
           </a:xfrm>
           <a:prstGeom prst="rect">
             <a:avLst/>
           </a:prstGeom>
         </p:spPr>
         <p:txBody>
-          <a:bodyPr anchor="t" rtlCol="false" tIns="0" lIns="0" bIns="0" rIns="0">
+          <a:bodyPr anchor="t" bIns="0" lIns="0" numCol="1" rIns="0" rtlCol="0" tIns="0">
             <a:spAutoFit/>
           </a:bodyPr>
           <a:lstStyle/>
@@ -3850,7 +3850,7 @@
               </a:lnSpc>
             </a:pPr>
             <a:r>
-              <a:rPr lang="en-US" sz="1500" b="true">
+              <a:rPr b="1" lang="en-US" sz="1500">
                 <a:solidFill>
                   <a:srgbClr val="FFFFFF"/>
                 </a:solidFill>
@@ -3859,28 +3859,28 @@
                 <a:cs typeface="Agrandir Bold"/>
                 <a:sym typeface="Agrandir Bold"/>
               </a:rPr>
-              <a:t>Conclusão:</a:t>
-            </a:r>
-          </a:p>
-        </p:txBody>
-      </p:sp>
-      <p:sp>
-        <p:nvSpPr>
-          <p:cNvPr name="TextBox 21" id="21"/>
-          <p:cNvSpPr txBox="true"/>
+              <a:t>CONCLUSÃO</a:t>
+            </a:r>
+          </a:p>
+        </p:txBody>
+      </p:sp>
+      <p:sp>
+        <p:nvSpPr>
+          <p:cNvPr id="21" name="TextBox 21"/>
+          <p:cNvSpPr txBox="1"/>
           <p:nvPr/>
         </p:nvSpPr>
         <p:spPr>
-          <a:xfrm rot="0">
-            <a:off x="604186" y="2016275"/>
-            <a:ext cx="2903568" cy="245745"/>
+          <a:xfrm>
+            <a:off x="770063" y="2026120"/>
+            <a:ext cx="2592143" cy="245269"/>
           </a:xfrm>
           <a:prstGeom prst="rect">
             <a:avLst/>
           </a:prstGeom>
         </p:spPr>
         <p:txBody>
-          <a:bodyPr anchor="t" rtlCol="false" tIns="0" lIns="0" bIns="0" rIns="0">
+          <a:bodyPr anchor="t" bIns="0" lIns="0" numCol="1" rIns="0" rtlCol="0" tIns="0">
             <a:spAutoFit/>
           </a:bodyPr>
           <a:lstStyle/>
@@ -3891,7 +3891,7 @@
               </a:lnSpc>
             </a:pPr>
             <a:r>
-              <a:rPr lang="en-US" sz="1500" b="true">
+              <a:rPr b="1" lang="en-US" sz="1500">
                 <a:solidFill>
                   <a:srgbClr val="FFFFFF"/>
                 </a:solidFill>
@@ -3900,33 +3900,33 @@
                 <a:cs typeface="Agrandir Bold"/>
                 <a:sym typeface="Agrandir Bold"/>
               </a:rPr>
-              <a:t>O que foi desenvolvido </a:t>
-            </a:r>
-          </a:p>
-        </p:txBody>
-      </p:sp>
-      <p:sp>
-        <p:nvSpPr>
-          <p:cNvPr name="TextBox 22" id="22"/>
-          <p:cNvSpPr txBox="true"/>
+              <a:t>O QUE FOI DESENVOLVIDO</a:t>
+            </a:r>
+          </a:p>
+        </p:txBody>
+      </p:sp>
+      <p:sp>
+        <p:nvSpPr>
+          <p:cNvPr id="22" name="TextBox 22"/>
+          <p:cNvSpPr txBox="1"/>
           <p:nvPr/>
         </p:nvSpPr>
         <p:spPr>
-          <a:xfrm rot="0">
-            <a:off x="642655" y="2292484"/>
-            <a:ext cx="2795718" cy="1129792"/>
+          <a:xfrm>
+            <a:off x="513433" y="2582258"/>
+            <a:ext cx="3066459" cy="1101481"/>
           </a:xfrm>
           <a:prstGeom prst="rect">
             <a:avLst/>
           </a:prstGeom>
         </p:spPr>
         <p:txBody>
-          <a:bodyPr anchor="t" rtlCol="false" tIns="0" lIns="0" bIns="0" rIns="0">
+          <a:bodyPr anchor="t" bIns="0" lIns="0" numCol="1" rIns="0" rtlCol="0" tIns="0">
             <a:spAutoFit/>
           </a:bodyPr>
           <a:lstStyle/>
           <a:p>
-            <a:pPr algn="l" marL="0" indent="0" lvl="0">
+            <a:pPr algn="ctr" indent="0" lvl="0" marL="0">
               <a:lnSpc>
                 <a:spcPts val="1483"/>
               </a:lnSpc>
@@ -3935,7 +3935,7 @@
               </a:spcBef>
             </a:pPr>
             <a:r>
-              <a:rPr lang="en-US" sz="1399">
+              <a:rPr lang="en-US" sz="1400">
                 <a:solidFill>
                   <a:srgbClr val="FFFFFF"/>
                 </a:solidFill>
@@ -3947,7 +3947,7 @@
               <a:t>A equipe desenvolveu uma ferramenta web para analisar e exibir o comportamento cíclico das operações modulares: </a:t>
             </a:r>
             <a:r>
-              <a:rPr lang="en-US" b="true" sz="1399">
+              <a:rPr b="1" lang="en-US" sz="1400">
                 <a:solidFill>
                   <a:srgbClr val="FFFFFF"/>
                 </a:solidFill>
@@ -3956,33 +3956,33 @@
                 <a:cs typeface="Agrandir Bold"/>
                 <a:sym typeface="Agrandir Bold"/>
               </a:rPr>
-              <a:t>soma, multiplicação e exponenciação modular.</a:t>
-            </a:r>
-          </a:p>
-        </p:txBody>
-      </p:sp>
-      <p:sp>
-        <p:nvSpPr>
-          <p:cNvPr name="TextBox 23" id="23"/>
-          <p:cNvSpPr txBox="true"/>
+              <a:t>soma, multiplicação e exponenciação.</a:t>
+            </a:r>
+          </a:p>
+        </p:txBody>
+      </p:sp>
+      <p:sp>
+        <p:nvSpPr>
+          <p:cNvPr id="23" name="TextBox 23"/>
+          <p:cNvSpPr txBox="1"/>
           <p:nvPr/>
         </p:nvSpPr>
         <p:spPr>
-          <a:xfrm rot="0">
-            <a:off x="756000" y="4684702"/>
-            <a:ext cx="6031499" cy="1672776"/>
+          <a:xfrm>
+            <a:off x="512312" y="4718984"/>
+            <a:ext cx="6367615" cy="1652588"/>
           </a:xfrm>
           <a:prstGeom prst="rect">
             <a:avLst/>
           </a:prstGeom>
         </p:spPr>
         <p:txBody>
-          <a:bodyPr anchor="t" rtlCol="false" tIns="0" lIns="0" bIns="0" rIns="0">
+          <a:bodyPr anchor="t" bIns="0" lIns="0" numCol="1" rIns="0" rtlCol="0" tIns="0">
             <a:spAutoFit/>
           </a:bodyPr>
           <a:lstStyle/>
           <a:p>
-            <a:pPr algn="l" marL="302979" indent="-151490" lvl="1">
+            <a:pPr algn="just" indent="-151490" lvl="1" marL="302979">
               <a:lnSpc>
                 <a:spcPts val="1487"/>
               </a:lnSpc>
@@ -3990,7 +3990,7 @@
               <a:buChar char="•"/>
             </a:pPr>
             <a:r>
-              <a:rPr lang="en-US" b="true" sz="1403">
+              <a:rPr b="1" lang="en-US" sz="1403">
                 <a:solidFill>
                   <a:srgbClr val="FFFFFF"/>
                 </a:solidFill>
@@ -4011,11 +4011,11 @@
                 <a:cs typeface="Agrandir"/>
                 <a:sym typeface="Agrandir"/>
               </a:rPr>
-              <a:t>: é uma forma mais simples, o movimento do ponteiro ocorre de forma linear, formando uma figura parecida com um polígono regular ou uma estrela dentro de um círculo.</a:t>
-            </a:r>
-          </a:p>
-          <a:p>
-            <a:pPr algn="l" marL="302979" indent="-151490" lvl="1">
+              <a:t>: é uma forma mais simples. O movimento do ponteiro ocorre de forma linear, formando uma figura parecida com um polígono regular ou uma estrela dentro de um círculo.</a:t>
+            </a:r>
+          </a:p>
+          <a:p>
+            <a:pPr algn="just" indent="-151490" lvl="1" marL="302979">
               <a:lnSpc>
                 <a:spcPts val="1487"/>
               </a:lnSpc>
@@ -4023,7 +4023,7 @@
               <a:buChar char="•"/>
             </a:pPr>
             <a:r>
-              <a:rPr lang="en-US" b="true" sz="1403" strike="noStrike" u="none">
+              <a:rPr b="1" lang="en-US" strike="noStrike" sz="1403" u="none">
                 <a:solidFill>
                   <a:srgbClr val="FFFFFF"/>
                 </a:solidFill>
@@ -4035,7 +4035,7 @@
               <a:t>Multiplicação</a:t>
             </a:r>
             <a:r>
-              <a:rPr lang="en-US" sz="1403" strike="noStrike" u="none">
+              <a:rPr lang="en-US" strike="noStrike" sz="1403" u="none">
                 <a:solidFill>
                   <a:srgbClr val="FFFFFF"/>
                 </a:solidFill>
@@ -4047,7 +4047,7 @@
               <a:t>: ao invés do ponteiro "caminhar", como na soma, na multiplicação ele realiza saltos, os valores são conectados por linhas, formando um </a:t>
             </a:r>
             <a:r>
-              <a:rPr lang="en-US" b="true" sz="1403" strike="noStrike" u="none">
+              <a:rPr b="1" lang="en-US" strike="noStrike" sz="1403" u="none">
                 <a:solidFill>
                   <a:srgbClr val="FFFFFF"/>
                 </a:solidFill>
@@ -4060,7 +4060,7 @@
             </a:r>
           </a:p>
           <a:p>
-            <a:pPr algn="l" marL="302979" indent="-151490" lvl="1">
+            <a:pPr algn="just" indent="-151490" lvl="1" marL="302979">
               <a:lnSpc>
                 <a:spcPts val="1487"/>
               </a:lnSpc>
@@ -4068,7 +4068,7 @@
               <a:buChar char="•"/>
             </a:pPr>
             <a:r>
-              <a:rPr lang="en-US" b="true" sz="1403" strike="noStrike" u="none">
+              <a:rPr b="1" lang="en-US" strike="noStrike" sz="1403" u="none">
                 <a:solidFill>
                   <a:srgbClr val="FFFFFF"/>
                 </a:solidFill>
@@ -4077,10 +4077,28 @@
                 <a:cs typeface="Agrandir Bold"/>
                 <a:sym typeface="Agrandir Bold"/>
               </a:rPr>
-              <a:t>Exponenciação: </a:t>
-            </a:r>
-            <a:r>
-              <a:rPr lang="en-US" sz="1403" strike="noStrike" u="none">
+              <a:t>Exponenciação</a:t>
+            </a:r>
+            <a:r>
+              <a:rPr b="0" strike="noStrike" sz="1403" u="none">
+                <a:solidFill>
+                  <a:srgbClr val="FFFFFF"/>
+                </a:solidFill>
+                <a:latin typeface="Agrandir Bold"/>
+              </a:rPr>
+              <a:t>:</a:t>
+            </a:r>
+            <a:r>
+              <a:rPr b="1" strike="noStrike" sz="1403" u="none">
+                <a:solidFill>
+                  <a:srgbClr val="FFFFFF"/>
+                </a:solidFill>
+                <a:latin typeface="Agrandir Bold"/>
+              </a:rPr>
+              <a:t> </a:t>
+            </a:r>
+            <a:r>
+              <a:rPr lang="en-US" strike="noStrike" sz="1403" u="none">
                 <a:solidFill>
                   <a:srgbClr val="FFFFFF"/>
                 </a:solidFill>
@@ -4089,10 +4107,10 @@
                 <a:cs typeface="Agrandir"/>
                 <a:sym typeface="Agrandir"/>
               </a:rPr>
-              <a:t>Ela apresenta saltos diferentes da multiplicação, que dão a impressão de aleatoriedade, essa impressão é utilizada na base da criptografia. Esse gráfico forma uma </a:t>
-            </a:r>
-            <a:r>
-              <a:rPr lang="en-US" b="true" sz="1403" strike="noStrike" u="none">
+              <a:t>apresenta saltos diferentes da multiplicação, que dão a impressão de aleatoriedade, essa impressão é utilizada na base da criptografia. Esse gráfico forma uma </a:t>
+            </a:r>
+            <a:r>
+              <a:rPr b="1" lang="en-US" strike="noStrike" sz="1403" u="none">
                 <a:solidFill>
                   <a:srgbClr val="FFFFFF"/>
                 </a:solidFill>
@@ -4104,7 +4122,7 @@
               <a:t>Órbita</a:t>
             </a:r>
             <a:r>
-              <a:rPr lang="en-US" sz="1403" strike="noStrike" u="none">
+              <a:rPr lang="en-US" strike="noStrike" sz="1403" u="none">
                 <a:solidFill>
                   <a:srgbClr val="FFFFFF"/>
                 </a:solidFill>
@@ -4120,26 +4138,26 @@
       </p:sp>
       <p:sp>
         <p:nvSpPr>
-          <p:cNvPr name="TextBox 24" id="24"/>
-          <p:cNvSpPr txBox="true"/>
+          <p:cNvPr id="24" name="TextBox 24"/>
+          <p:cNvSpPr txBox="1"/>
           <p:nvPr/>
         </p:nvSpPr>
         <p:spPr>
-          <a:xfrm rot="0">
-            <a:off x="662691" y="9434053"/>
-            <a:ext cx="6234619" cy="1002470"/>
+          <a:xfrm>
+            <a:off x="605512" y="9631098"/>
+            <a:ext cx="6234560" cy="912019"/>
           </a:xfrm>
           <a:prstGeom prst="rect">
             <a:avLst/>
           </a:prstGeom>
         </p:spPr>
         <p:txBody>
-          <a:bodyPr anchor="t" rtlCol="false" tIns="0" lIns="0" bIns="0" rIns="0">
+          <a:bodyPr anchor="t" bIns="0" lIns="0" numCol="1" rIns="0" rtlCol="0" tIns="0">
             <a:spAutoFit/>
           </a:bodyPr>
           <a:lstStyle/>
           <a:p>
-            <a:pPr algn="just">
+            <a:pPr algn="ctr">
               <a:lnSpc>
                 <a:spcPts val="1275"/>
               </a:lnSpc>
@@ -4157,7 +4175,7 @@
               <a:t>Em suma, todas essas operações têm diversos usos na tecnologia, por exemplo: </a:t>
             </a:r>
             <a:r>
-              <a:rPr lang="en-US" sz="1203" b="true">
+              <a:rPr b="1" lang="en-US" sz="1203">
                 <a:solidFill>
                   <a:srgbClr val="FFFFFF"/>
                 </a:solidFill>
@@ -4181,7 +4199,7 @@
               <a:t>é utilizada na geração de texturas para objetos 3D, </a:t>
             </a:r>
             <a:r>
-              <a:rPr lang="en-US" sz="1203" b="true">
+              <a:rPr b="1" lang="en-US" sz="1203">
                 <a:solidFill>
                   <a:srgbClr val="FFFFFF"/>
                 </a:solidFill>
@@ -4205,7 +4223,7 @@
               <a:t>é utilizada para garantir que dados não se corromperam durante uma transferência e a </a:t>
             </a:r>
             <a:r>
-              <a:rPr lang="en-US" sz="1203" b="true">
+              <a:rPr b="1" lang="en-US" sz="1203">
                 <a:solidFill>
                   <a:srgbClr val="FFFFFF"/>
                 </a:solidFill>
@@ -4230,7 +4248,7 @@
             </a:r>
           </a:p>
           <a:p>
-            <a:pPr algn="just" marL="0" indent="0" lvl="0">
+            <a:pPr algn="ctr" indent="0" lvl="0" marL="0">
               <a:lnSpc>
                 <a:spcPts val="1275"/>
               </a:lnSpc>
@@ -4255,26 +4273,26 @@
       </p:sp>
       <p:sp>
         <p:nvSpPr>
-          <p:cNvPr name="TextBox 25" id="25"/>
-          <p:cNvSpPr txBox="true"/>
+          <p:cNvPr id="25" name="TextBox 25"/>
+          <p:cNvSpPr txBox="1"/>
           <p:nvPr/>
         </p:nvSpPr>
         <p:spPr>
-          <a:xfrm rot="0">
-            <a:off x="604186" y="598075"/>
-            <a:ext cx="2068497" cy="910248"/>
+          <a:xfrm>
+            <a:off x="552300" y="546189"/>
+            <a:ext cx="2068268" cy="910233"/>
           </a:xfrm>
           <a:prstGeom prst="rect">
             <a:avLst/>
           </a:prstGeom>
         </p:spPr>
         <p:txBody>
-          <a:bodyPr anchor="t" rtlCol="false" tIns="0" lIns="0" bIns="0" rIns="0">
+          <a:bodyPr anchor="t" bIns="0" lIns="0" numCol="1" rIns="0" rtlCol="0" tIns="0">
             <a:spAutoFit/>
           </a:bodyPr>
           <a:lstStyle/>
           <a:p>
-            <a:pPr algn="l">
+            <a:pPr algn="ctr">
               <a:lnSpc>
                 <a:spcPts val="2319"/>
               </a:lnSpc>
@@ -4289,28 +4307,28 @@
                 <a:cs typeface="Museo Moderno"/>
                 <a:sym typeface="Museo Moderno"/>
               </a:rPr>
-              <a:t>RELATÓRIO DA PESQUISA </a:t>
-            </a:r>
-          </a:p>
-        </p:txBody>
-      </p:sp>
-      <p:sp>
-        <p:nvSpPr>
-          <p:cNvPr name="TextBox 26" id="26"/>
-          <p:cNvSpPr txBox="true"/>
+              <a:t>RELATÓRIO EXECUTIVO DE PESQUISA </a:t>
+            </a:r>
+          </a:p>
+        </p:txBody>
+      </p:sp>
+      <p:sp>
+        <p:nvSpPr>
+          <p:cNvPr id="26" name="TextBox 26"/>
+          <p:cNvSpPr txBox="1"/>
           <p:nvPr/>
         </p:nvSpPr>
         <p:spPr>
-          <a:xfrm rot="0">
-            <a:off x="4067702" y="2016275"/>
-            <a:ext cx="2903568" cy="245745"/>
+          <a:xfrm>
+            <a:off x="5006692" y="2016060"/>
+            <a:ext cx="1043140" cy="245269"/>
           </a:xfrm>
           <a:prstGeom prst="rect">
             <a:avLst/>
           </a:prstGeom>
         </p:spPr>
         <p:txBody>
-          <a:bodyPr anchor="t" rtlCol="false" tIns="0" lIns="0" bIns="0" rIns="0">
+          <a:bodyPr anchor="t" bIns="0" lIns="0" numCol="1" rIns="0" rtlCol="0" tIns="0">
             <a:spAutoFit/>
           </a:bodyPr>
           <a:lstStyle/>
@@ -4321,7 +4339,7 @@
               </a:lnSpc>
             </a:pPr>
             <a:r>
-              <a:rPr lang="en-US" sz="1500" b="true">
+              <a:rPr b="1" lang="en-US" sz="1500">
                 <a:solidFill>
                   <a:srgbClr val="FFFFFF"/>
                 </a:solidFill>
@@ -4330,33 +4348,33 @@
                 <a:cs typeface="Agrandir Bold"/>
                 <a:sym typeface="Agrandir Bold"/>
               </a:rPr>
-              <a:t>Objetivo</a:t>
-            </a:r>
-          </a:p>
-        </p:txBody>
-      </p:sp>
-      <p:sp>
-        <p:nvSpPr>
-          <p:cNvPr name="TextBox 27" id="27"/>
-          <p:cNvSpPr txBox="true"/>
+              <a:t>OBJETIVO</a:t>
+            </a:r>
+          </a:p>
+        </p:txBody>
+      </p:sp>
+      <p:sp>
+        <p:nvSpPr>
+          <p:cNvPr id="27" name="TextBox 27"/>
+          <p:cNvSpPr txBox="1"/>
           <p:nvPr/>
         </p:nvSpPr>
         <p:spPr>
-          <a:xfrm rot="0">
-            <a:off x="4187447" y="2292484"/>
-            <a:ext cx="2664078" cy="1672776"/>
+          <a:xfrm>
+            <a:off x="4208160" y="2313039"/>
+            <a:ext cx="2664028" cy="1609430"/>
           </a:xfrm>
           <a:prstGeom prst="rect">
             <a:avLst/>
           </a:prstGeom>
         </p:spPr>
         <p:txBody>
-          <a:bodyPr anchor="t" rtlCol="false" tIns="0" lIns="0" bIns="0" rIns="0">
+          <a:bodyPr anchor="t" bIns="0" lIns="0" numCol="1" rIns="0" rtlCol="0" tIns="0">
             <a:spAutoFit/>
           </a:bodyPr>
           <a:lstStyle/>
           <a:p>
-            <a:pPr algn="l" marL="0" indent="0" lvl="0">
+            <a:pPr algn="ctr" indent="0" lvl="0" marL="0">
               <a:lnSpc>
                 <a:spcPts val="1487"/>
               </a:lnSpc>
@@ -4374,28 +4392,28 @@
                 <a:cs typeface="Agrandir"/>
                 <a:sym typeface="Agrandir"/>
               </a:rPr>
-              <a:t>O sistema representa o funcionamento dessas operações por meio de um relógio e as diferentes formas que seu ponteiro se move. Essa representação visual busca facilitar a compreensão do comportamento dessas funções e facilitar o uso delas.</a:t>
-            </a:r>
-          </a:p>
-        </p:txBody>
-      </p:sp>
-      <p:sp>
-        <p:nvSpPr>
-          <p:cNvPr name="TextBox 28" id="28"/>
-          <p:cNvSpPr txBox="true"/>
+              <a:t>O sistema representa o funcionamento dessas operações por meio de um relógio e as diferentes formas geométricas que seu ponteiro compõe ao se mover. Essa representação visual busca facilitar a compreensão do comportamento dessas funções e facilitar o uso delas.</a:t>
+            </a:r>
+          </a:p>
+        </p:txBody>
+      </p:sp>
+      <p:sp>
+        <p:nvSpPr>
+          <p:cNvPr id="28" name="TextBox 28"/>
+          <p:cNvSpPr txBox="1"/>
           <p:nvPr/>
         </p:nvSpPr>
         <p:spPr>
-          <a:xfrm rot="0">
-            <a:off x="588730" y="4458007"/>
-            <a:ext cx="6382539" cy="245745"/>
+          <a:xfrm>
+            <a:off x="3156875" y="4395486"/>
+            <a:ext cx="1211904" cy="245269"/>
           </a:xfrm>
           <a:prstGeom prst="rect">
             <a:avLst/>
           </a:prstGeom>
         </p:spPr>
         <p:txBody>
-          <a:bodyPr anchor="t" rtlCol="false" tIns="0" lIns="0" bIns="0" rIns="0">
+          <a:bodyPr anchor="t" bIns="0" lIns="0" numCol="1" rIns="0" rtlCol="0" tIns="0">
             <a:spAutoFit/>
           </a:bodyPr>
           <a:lstStyle/>
@@ -4406,7 +4424,7 @@
               </a:lnSpc>
             </a:pPr>
             <a:r>
-              <a:rPr lang="en-US" sz="1500" b="true">
+              <a:rPr b="1" lang="en-US" sz="1500">
                 <a:solidFill>
                   <a:srgbClr val="FFFFFF"/>
                 </a:solidFill>
@@ -4415,21 +4433,21 @@
                 <a:cs typeface="Agrandir Bold"/>
                 <a:sym typeface="Agrandir Bold"/>
               </a:rPr>
-              <a:t>Operações</a:t>
+              <a:t>OPERAÇÕES</a:t>
             </a:r>
           </a:p>
         </p:txBody>
       </p:sp>
       <p:grpSp>
         <p:nvGrpSpPr>
-          <p:cNvPr name="Group 29" id="29"/>
+          <p:cNvPr id="29" name="Group 29"/>
           <p:cNvGrpSpPr>
             <a:grpSpLocks noChangeAspect="true"/>
           </p:cNvGrpSpPr>
           <p:nvPr/>
         </p:nvGrpSpPr>
         <p:grpSpPr>
-          <a:xfrm rot="0">
+          <a:xfrm>
             <a:off x="2778967" y="6742415"/>
             <a:ext cx="2002065" cy="2030603"/>
             <a:chOff x="0" y="0"/>
@@ -4438,12 +4456,12 @@
         </p:grpSpPr>
         <p:sp>
           <p:nvSpPr>
-            <p:cNvPr name="Freeform 30" id="30"/>
+            <p:cNvPr id="30" name="Freeform 30"/>
             <p:cNvSpPr/>
             <p:nvPr/>
           </p:nvSpPr>
           <p:spPr>
-            <a:xfrm flipH="false" flipV="false" rot="0">
+            <a:xfrm>
               <a:off x="123136" y="244952"/>
               <a:ext cx="11306283" cy="11266943"/>
             </a:xfrm>
@@ -4452,7 +4470,7 @@
               <a:gdLst/>
               <a:ahLst/>
               <a:cxnLst/>
-              <a:rect r="r" b="b" t="t" l="l"/>
+              <a:rect b="b" l="l" r="r" t="t"/>
               <a:pathLst>
                 <a:path h="11266943" w="11306283">
                   <a:moveTo>
@@ -4495,19 +4513,19 @@
             <a:blipFill>
               <a:blip r:embed="rId5"/>
               <a:stretch>
-                <a:fillRect l="-4481" t="0" r="-4481" b="0"/>
+                <a:fillRect b="0" l="-4481" r="-4481" t="0"/>
               </a:stretch>
             </a:blipFill>
           </p:spPr>
         </p:sp>
         <p:sp>
           <p:nvSpPr>
-            <p:cNvPr name="Freeform 31" id="31"/>
+            <p:cNvPr id="31" name="Freeform 31"/>
             <p:cNvSpPr/>
             <p:nvPr/>
           </p:nvSpPr>
           <p:spPr>
-            <a:xfrm flipH="false" flipV="false" rot="0">
+            <a:xfrm>
               <a:off x="0" y="0"/>
               <a:ext cx="11575567" cy="11745316"/>
             </a:xfrm>
@@ -4516,7 +4534,7 @@
               <a:gdLst/>
               <a:ahLst/>
               <a:cxnLst/>
-              <a:rect r="r" b="b" t="t" l="l"/>
+              <a:rect b="b" l="l" r="r" t="t"/>
               <a:pathLst>
                 <a:path h="11745316" w="11575567">
                   <a:moveTo>
@@ -4538,7 +4556,7 @@
             <a:blipFill>
               <a:blip r:embed="rId4"/>
               <a:stretch>
-                <a:fillRect l="-272" t="0" r="-272" b="0"/>
+                <a:fillRect b="0" l="-272" r="-272" t="0"/>
               </a:stretch>
             </a:blipFill>
           </p:spPr>
@@ -4546,14 +4564,14 @@
       </p:grpSp>
       <p:grpSp>
         <p:nvGrpSpPr>
-          <p:cNvPr name="Group 32" id="32"/>
+          <p:cNvPr id="32" name="Group 32"/>
           <p:cNvGrpSpPr>
             <a:grpSpLocks noChangeAspect="true"/>
           </p:cNvGrpSpPr>
           <p:nvPr/>
         </p:nvGrpSpPr>
         <p:grpSpPr>
-          <a:xfrm rot="0">
+          <a:xfrm>
             <a:off x="604186" y="6696695"/>
             <a:ext cx="2002065" cy="2030603"/>
             <a:chOff x="0" y="0"/>
@@ -4562,12 +4580,12 @@
         </p:grpSpPr>
         <p:sp>
           <p:nvSpPr>
-            <p:cNvPr name="Freeform 33" id="33"/>
+            <p:cNvPr id="33" name="Freeform 33"/>
             <p:cNvSpPr/>
             <p:nvPr/>
           </p:nvSpPr>
           <p:spPr>
-            <a:xfrm flipH="false" flipV="false" rot="0">
+            <a:xfrm>
               <a:off x="123136" y="244952"/>
               <a:ext cx="11306283" cy="11266943"/>
             </a:xfrm>
@@ -4576,7 +4594,7 @@
               <a:gdLst/>
               <a:ahLst/>
               <a:cxnLst/>
-              <a:rect r="r" b="b" t="t" l="l"/>
+              <a:rect b="b" l="l" r="r" t="t"/>
               <a:pathLst>
                 <a:path h="11266943" w="11306283">
                   <a:moveTo>
@@ -4619,19 +4637,19 @@
             <a:blipFill>
               <a:blip r:embed="rId6"/>
               <a:stretch>
-                <a:fillRect l="223" t="-1231" r="223" b="-1231"/>
+                <a:fillRect b="-1231" l="223" r="223" t="-1231"/>
               </a:stretch>
             </a:blipFill>
           </p:spPr>
         </p:sp>
         <p:sp>
           <p:nvSpPr>
-            <p:cNvPr name="Freeform 34" id="34"/>
+            <p:cNvPr id="34" name="Freeform 34"/>
             <p:cNvSpPr/>
             <p:nvPr/>
           </p:nvSpPr>
           <p:spPr>
-            <a:xfrm flipH="false" flipV="false" rot="0">
+            <a:xfrm>
               <a:off x="0" y="0"/>
               <a:ext cx="11575567" cy="11745316"/>
             </a:xfrm>
@@ -4640,7 +4658,7 @@
               <a:gdLst/>
               <a:ahLst/>
               <a:cxnLst/>
-              <a:rect r="r" b="b" t="t" l="l"/>
+              <a:rect b="b" l="l" r="r" t="t"/>
               <a:pathLst>
                 <a:path h="11745316" w="11575567">
                   <a:moveTo>
@@ -4662,7 +4680,7 @@
             <a:blipFill>
               <a:blip r:embed="rId4"/>
               <a:stretch>
-                <a:fillRect l="-272" t="0" r="-272" b="0"/>
+                <a:fillRect b="0" l="-272" r="-272" t="0"/>
               </a:stretch>
             </a:blipFill>
           </p:spPr>
@@ -4670,21 +4688,21 @@
       </p:grpSp>
       <p:sp>
         <p:nvSpPr>
-          <p:cNvPr name="TextBox 35" id="35"/>
-          <p:cNvSpPr txBox="true"/>
+          <p:cNvPr id="35" name="TextBox 35"/>
+          <p:cNvSpPr txBox="1"/>
           <p:nvPr/>
         </p:nvSpPr>
         <p:spPr>
-          <a:xfrm rot="0">
-            <a:off x="725659" y="8698723"/>
-            <a:ext cx="1759120" cy="240665"/>
+          <a:xfrm>
+            <a:off x="834456" y="8887896"/>
+            <a:ext cx="1645596" cy="337394"/>
           </a:xfrm>
           <a:prstGeom prst="rect">
             <a:avLst/>
           </a:prstGeom>
         </p:spPr>
         <p:txBody>
-          <a:bodyPr anchor="t" rtlCol="false" tIns="0" lIns="0" bIns="0" rIns="0">
+          <a:bodyPr anchor="t" bIns="0" lIns="0" numCol="1" rIns="0" rtlCol="0" tIns="0">
             <a:spAutoFit/>
           </a:bodyPr>
           <a:lstStyle/>
@@ -4704,28 +4722,28 @@
                 <a:cs typeface="Open Sans"/>
                 <a:sym typeface="Open Sans"/>
               </a:rPr>
-              <a:t>gráfico multiplicação </a:t>
-            </a:r>
-          </a:p>
-        </p:txBody>
-      </p:sp>
-      <p:sp>
-        <p:nvSpPr>
-          <p:cNvPr name="TextBox 36" id="36"/>
-          <p:cNvSpPr txBox="true"/>
+              <a:t>MULTIPLICAÇÃO</a:t>
+            </a:r>
+          </a:p>
+        </p:txBody>
+      </p:sp>
+      <p:sp>
+        <p:nvSpPr>
+          <p:cNvPr id="36" name="TextBox 36"/>
+          <p:cNvSpPr txBox="1"/>
           <p:nvPr/>
         </p:nvSpPr>
         <p:spPr>
-          <a:xfrm rot="0">
-            <a:off x="2827387" y="8698723"/>
-            <a:ext cx="1905227" cy="240665"/>
+          <a:xfrm>
+            <a:off x="2884275" y="8899711"/>
+            <a:ext cx="1836839" cy="315218"/>
           </a:xfrm>
           <a:prstGeom prst="rect">
             <a:avLst/>
           </a:prstGeom>
         </p:spPr>
         <p:txBody>
-          <a:bodyPr anchor="t" rtlCol="false" tIns="0" lIns="0" bIns="0" rIns="0">
+          <a:bodyPr anchor="t" bIns="0" lIns="0" numCol="1" rIns="0" rtlCol="0" tIns="0">
             <a:spAutoFit/>
           </a:bodyPr>
           <a:lstStyle/>
@@ -4745,28 +4763,28 @@
                 <a:cs typeface="Open Sans"/>
                 <a:sym typeface="Open Sans"/>
               </a:rPr>
-              <a:t>gráfico exponenciação </a:t>
-            </a:r>
-          </a:p>
-        </p:txBody>
-      </p:sp>
-      <p:sp>
-        <p:nvSpPr>
-          <p:cNvPr name="TextBox 37" id="37"/>
-          <p:cNvSpPr txBox="true"/>
+              <a:t>EXPONENCIAÇÃO</a:t>
+            </a:r>
+          </a:p>
+        </p:txBody>
+      </p:sp>
+      <p:sp>
+        <p:nvSpPr>
+          <p:cNvPr id="37" name="TextBox 37"/>
+          <p:cNvSpPr txBox="1"/>
           <p:nvPr/>
         </p:nvSpPr>
         <p:spPr>
-          <a:xfrm rot="0">
-            <a:off x="5412713" y="8744443"/>
-            <a:ext cx="1115049" cy="240665"/>
+          <a:xfrm>
+            <a:off x="5454082" y="8889623"/>
+            <a:ext cx="1114873" cy="314772"/>
           </a:xfrm>
           <a:prstGeom prst="rect">
             <a:avLst/>
           </a:prstGeom>
         </p:spPr>
         <p:txBody>
-          <a:bodyPr anchor="t" rtlCol="false" tIns="0" lIns="0" bIns="0" rIns="0">
+          <a:bodyPr anchor="t" bIns="0" lIns="0" numCol="1" rIns="0" rtlCol="0" tIns="0">
             <a:spAutoFit/>
           </a:bodyPr>
           <a:lstStyle/>
@@ -4786,7 +4804,7 @@
                 <a:cs typeface="Open Sans"/>
                 <a:sym typeface="Open Sans"/>
               </a:rPr>
-              <a:t>gráfico soma </a:t>
+              <a:t>SOMA</a:t>
             </a:r>
           </a:p>
         </p:txBody>
@@ -4804,10 +4822,10 @@
   <a:themeElements>
     <a:clrScheme name="Office">
       <a:dk1>
-        <a:sysClr val="windowText" lastClr="000000"/>
+        <a:sysClr lastClr="000000" val="windowText"/>
       </a:dk1>
       <a:lt1>
-        <a:sysClr val="window" lastClr="FFFFFF"/>
+        <a:sysClr lastClr="FFFFFF" val="window"/>
       </a:lt1>
       <a:dk2>
         <a:srgbClr val="1F497D"/>
@@ -4963,7 +4981,7 @@
         </a:gradFill>
       </a:fillStyleLst>
       <a:lnStyleLst>
-        <a:ln w="9525" cap="flat" cmpd="sng" algn="ctr">
+        <a:ln algn="ctr" cap="flat" cmpd="sng" w="9525">
           <a:solidFill>
             <a:schemeClr val="phClr">
               <a:shade val="95000"/>
@@ -4972,13 +4990,13 @@
           </a:solidFill>
           <a:prstDash val="solid"/>
         </a:ln>
-        <a:ln w="25400" cap="flat" cmpd="sng" algn="ctr">
+        <a:ln algn="ctr" cap="flat" cmpd="sng" w="25400">
           <a:solidFill>
             <a:schemeClr val="phClr"/>
           </a:solidFill>
           <a:prstDash val="solid"/>
         </a:ln>
-        <a:ln w="38100" cap="flat" cmpd="sng" algn="ctr">
+        <a:ln algn="ctr" cap="flat" cmpd="sng" w="38100">
           <a:solidFill>
             <a:schemeClr val="phClr"/>
           </a:solidFill>
@@ -4988,7 +5006,7 @@
       <a:effectStyleLst>
         <a:effectStyle>
           <a:effectLst>
-            <a:outerShdw blurRad="40000" dist="20000" dir="5400000" rotWithShape="0">
+            <a:outerShdw blurRad="40000" dir="5400000" dist="20000" rotWithShape="0">
               <a:srgbClr val="000000">
                 <a:alpha val="38000"/>
               </a:srgbClr>
@@ -4997,7 +5015,7 @@
         </a:effectStyle>
         <a:effectStyle>
           <a:effectLst>
-            <a:outerShdw blurRad="40000" dist="23000" dir="5400000" rotWithShape="0">
+            <a:outerShdw blurRad="40000" dir="5400000" dist="23000" rotWithShape="0">
               <a:srgbClr val="000000">
                 <a:alpha val="35000"/>
               </a:srgbClr>
@@ -5006,7 +5024,7 @@
         </a:effectStyle>
         <a:effectStyle>
           <a:effectLst>
-            <a:outerShdw blurRad="40000" dist="23000" dir="5400000" rotWithShape="0">
+            <a:outerShdw blurRad="40000" dir="5400000" dist="23000" rotWithShape="0">
               <a:srgbClr val="000000">
                 <a:alpha val="35000"/>
               </a:srgbClr>
@@ -5016,12 +5034,12 @@
             <a:camera prst="orthographicFront">
               <a:rot lat="0" lon="0" rev="0"/>
             </a:camera>
-            <a:lightRig rig="threePt" dir="t">
+            <a:lightRig dir="t" rig="threePt">
               <a:rot lat="0" lon="0" rev="1200000"/>
             </a:lightRig>
           </a:scene3d>
           <a:sp3d>
-            <a:bevelT w="63500" h="25400"/>
+            <a:bevelT h="25400" w="63500"/>
           </a:sp3d>
         </a:effectStyle>
       </a:effectStyleLst>
@@ -5052,7 +5070,7 @@
             </a:gs>
           </a:gsLst>
           <a:path path="circle">
-            <a:fillToRect l="50000" t="-80000" r="50000" b="180000"/>
+            <a:fillToRect b="180000" l="50000" r="50000" t="-80000"/>
           </a:path>
         </a:gradFill>
         <a:gradFill rotWithShape="1">
@@ -5071,7 +5089,7 @@
             </a:gs>
           </a:gsLst>
           <a:path path="circle">
-            <a:fillToRect l="50000" t="50000" r="50000" b="50000"/>
+            <a:fillToRect b="50000" l="50000" r="50000" t="50000"/>
           </a:path>
         </a:gradFill>
       </a:bgFillStyleLst>
